--- a/计算机组成原理/Cache实验/实验5/cache实验与讲解.pptx
+++ b/计算机组成原理/Cache实验/实验5/cache实验与讲解.pptx
@@ -1,26 +1,26 @@
 
 <file path=ppt/presentation.xml><?xml version="1.0" encoding="utf-8"?>
-<p:presentation xmlns:a="http://schemas.openxmlformats.org/drawingml/2006/main" xmlns:r="http://schemas.openxmlformats.org/officeDocument/2006/relationships" xmlns:p="http://schemas.openxmlformats.org/presentationml/2006/main" saveSubsetFonts="1">
+<p:presentation xmlns:a="http://schemas.openxmlformats.org/drawingml/2006/main" xmlns:r="http://schemas.openxmlformats.org/officeDocument/2006/relationships" xmlns:p="http://schemas.openxmlformats.org/presentationml/2006/main">
   <p:sldMasterIdLst>
     <p:sldMasterId id="2147483648" r:id="rId1"/>
   </p:sldMasterIdLst>
   <p:sldIdLst>
-    <p:sldId id="256" r:id="rId2"/>
-    <p:sldId id="258" r:id="rId3"/>
-    <p:sldId id="259" r:id="rId4"/>
-    <p:sldId id="261" r:id="rId5"/>
-    <p:sldId id="257" r:id="rId6"/>
-    <p:sldId id="260" r:id="rId7"/>
-    <p:sldId id="262" r:id="rId8"/>
-    <p:sldId id="263" r:id="rId9"/>
-    <p:sldId id="265" r:id="rId10"/>
-    <p:sldId id="266" r:id="rId11"/>
-    <p:sldId id="264" r:id="rId12"/>
-    <p:sldId id="267" r:id="rId13"/>
-    <p:sldId id="268" r:id="rId14"/>
-    <p:sldId id="269" r:id="rId15"/>
-    <p:sldId id="270" r:id="rId16"/>
-    <p:sldId id="271" r:id="rId17"/>
+    <p:sldId id="256" r:id="rId3"/>
+    <p:sldId id="258" r:id="rId4"/>
+    <p:sldId id="259" r:id="rId5"/>
+    <p:sldId id="261" r:id="rId6"/>
+    <p:sldId id="257" r:id="rId7"/>
+    <p:sldId id="260" r:id="rId8"/>
+    <p:sldId id="262" r:id="rId9"/>
+    <p:sldId id="263" r:id="rId10"/>
+    <p:sldId id="265" r:id="rId11"/>
+    <p:sldId id="266" r:id="rId12"/>
+    <p:sldId id="264" r:id="rId13"/>
+    <p:sldId id="267" r:id="rId14"/>
+    <p:sldId id="268" r:id="rId15"/>
+    <p:sldId id="269" r:id="rId16"/>
+    <p:sldId id="270" r:id="rId17"/>
+    <p:sldId id="271" r:id="rId18"/>
   </p:sldIdLst>
   <p:sldSz cx="12192000" cy="6858000"/>
   <p:notesSz cx="6858000" cy="9144000"/>
@@ -119,11 +119,6 @@
       </a:defRPr>
     </a:lvl9pPr>
   </p:defaultTextStyle>
-  <p:extLst>
-    <p:ext uri="{EFAFB233-063F-42B5-8137-9DF3F51BA10A}">
-      <p15:sldGuideLst xmlns:p15="http://schemas.microsoft.com/office/powerpoint/2012/main"/>
-    </p:ext>
-  </p:extLst>
 </p:presentation>
 </file>
 
@@ -146,13 +141,7 @@
       </p:grpSpPr>
       <p:sp>
         <p:nvSpPr>
-          <p:cNvPr id="2" name="标题 1">
-            <a:extLst>
-              <a:ext uri="{FF2B5EF4-FFF2-40B4-BE49-F238E27FC236}">
-                <a16:creationId xmlns:a16="http://schemas.microsoft.com/office/drawing/2014/main" id="{F97AD80D-B07B-44F3-8CBD-0171C9F18988}"/>
-              </a:ext>
-            </a:extLst>
-          </p:cNvPr>
+          <p:cNvPr id="2" name="标题 1"/>
           <p:cNvSpPr>
             <a:spLocks noGrp="1"/>
           </p:cNvSpPr>
@@ -178,18 +167,13 @@
               <a:rPr lang="zh-CN" altLang="en-US"/>
               <a:t>单击此处编辑母版标题样式</a:t>
             </a:r>
-          </a:p>
-        </p:txBody>
-      </p:sp>
-      <p:sp>
-        <p:nvSpPr>
-          <p:cNvPr id="3" name="副标题 2">
-            <a:extLst>
-              <a:ext uri="{FF2B5EF4-FFF2-40B4-BE49-F238E27FC236}">
-                <a16:creationId xmlns:a16="http://schemas.microsoft.com/office/drawing/2014/main" id="{1D7ECDDC-2017-4A5C-AF8D-0A6E1041398F}"/>
-              </a:ext>
-            </a:extLst>
-          </p:cNvPr>
+            <a:endParaRPr lang="zh-CN" altLang="en-US"/>
+          </a:p>
+        </p:txBody>
+      </p:sp>
+      <p:sp>
+        <p:nvSpPr>
+          <p:cNvPr id="3" name="副标题 2"/>
           <p:cNvSpPr>
             <a:spLocks noGrp="1"/>
           </p:cNvSpPr>
@@ -248,18 +232,13 @@
               <a:rPr lang="zh-CN" altLang="en-US"/>
               <a:t>单击此处编辑母版副标题样式</a:t>
             </a:r>
-          </a:p>
-        </p:txBody>
-      </p:sp>
-      <p:sp>
-        <p:nvSpPr>
-          <p:cNvPr id="4" name="日期占位符 3">
-            <a:extLst>
-              <a:ext uri="{FF2B5EF4-FFF2-40B4-BE49-F238E27FC236}">
-                <a16:creationId xmlns:a16="http://schemas.microsoft.com/office/drawing/2014/main" id="{FF41459F-3B52-486F-B6CE-5C12C2BCBF5B}"/>
-              </a:ext>
-            </a:extLst>
-          </p:cNvPr>
+            <a:endParaRPr lang="zh-CN" altLang="en-US"/>
+          </a:p>
+        </p:txBody>
+      </p:sp>
+      <p:sp>
+        <p:nvSpPr>
+          <p:cNvPr id="4" name="日期占位符 3"/>
           <p:cNvSpPr>
             <a:spLocks noGrp="1"/>
           </p:cNvSpPr>
@@ -274,7 +253,6 @@
           <a:p>
             <a:fld id="{75BAA5F5-FC70-4B12-A99D-83B1354032EB}" type="datetimeFigureOut">
               <a:rPr lang="zh-CN" altLang="en-US" smtClean="0"/>
-              <a:t>2020/10/30</a:t>
             </a:fld>
             <a:endParaRPr lang="zh-CN" altLang="en-US"/>
           </a:p>
@@ -282,13 +260,7 @@
       </p:sp>
       <p:sp>
         <p:nvSpPr>
-          <p:cNvPr id="5" name="页脚占位符 4">
-            <a:extLst>
-              <a:ext uri="{FF2B5EF4-FFF2-40B4-BE49-F238E27FC236}">
-                <a16:creationId xmlns:a16="http://schemas.microsoft.com/office/drawing/2014/main" id="{7CCA013A-3B6D-464B-B485-BF10F73BFE6F}"/>
-              </a:ext>
-            </a:extLst>
-          </p:cNvPr>
+          <p:cNvPr id="5" name="页脚占位符 4"/>
           <p:cNvSpPr>
             <a:spLocks noGrp="1"/>
           </p:cNvSpPr>
@@ -307,13 +279,7 @@
       </p:sp>
       <p:sp>
         <p:nvSpPr>
-          <p:cNvPr id="6" name="灯片编号占位符 5">
-            <a:extLst>
-              <a:ext uri="{FF2B5EF4-FFF2-40B4-BE49-F238E27FC236}">
-                <a16:creationId xmlns:a16="http://schemas.microsoft.com/office/drawing/2014/main" id="{C4603D81-6B1F-427B-ACF2-0A1599918CD7}"/>
-              </a:ext>
-            </a:extLst>
-          </p:cNvPr>
+          <p:cNvPr id="6" name="灯片编号占位符 5"/>
           <p:cNvSpPr>
             <a:spLocks noGrp="1"/>
           </p:cNvSpPr>
@@ -328,18 +294,12 @@
           <a:p>
             <a:fld id="{1607E48A-8F5F-465B-A255-599B251FF974}" type="slidenum">
               <a:rPr lang="zh-CN" altLang="en-US" smtClean="0"/>
-              <a:t>‹#›</a:t>
             </a:fld>
             <a:endParaRPr lang="zh-CN" altLang="en-US"/>
           </a:p>
         </p:txBody>
       </p:sp>
     </p:spTree>
-    <p:extLst>
-      <p:ext uri="{BB962C8B-B14F-4D97-AF65-F5344CB8AC3E}">
-        <p14:creationId xmlns:p14="http://schemas.microsoft.com/office/powerpoint/2010/main" val="2082440711"/>
-      </p:ext>
-    </p:extLst>
   </p:cSld>
   <p:clrMapOvr>
     <a:masterClrMapping/>
@@ -366,13 +326,7 @@
       </p:grpSpPr>
       <p:sp>
         <p:nvSpPr>
-          <p:cNvPr id="2" name="标题 1">
-            <a:extLst>
-              <a:ext uri="{FF2B5EF4-FFF2-40B4-BE49-F238E27FC236}">
-                <a16:creationId xmlns:a16="http://schemas.microsoft.com/office/drawing/2014/main" id="{E3D74ADB-F25E-43E0-A194-FF4B2C24E38E}"/>
-              </a:ext>
-            </a:extLst>
-          </p:cNvPr>
+          <p:cNvPr id="2" name="标题 1"/>
           <p:cNvSpPr>
             <a:spLocks noGrp="1"/>
           </p:cNvSpPr>
@@ -389,18 +343,13 @@
               <a:rPr lang="zh-CN" altLang="en-US"/>
               <a:t>单击此处编辑母版标题样式</a:t>
             </a:r>
-          </a:p>
-        </p:txBody>
-      </p:sp>
-      <p:sp>
-        <p:nvSpPr>
-          <p:cNvPr id="3" name="竖排文字占位符 2">
-            <a:extLst>
-              <a:ext uri="{FF2B5EF4-FFF2-40B4-BE49-F238E27FC236}">
-                <a16:creationId xmlns:a16="http://schemas.microsoft.com/office/drawing/2014/main" id="{390AEB96-EA48-4FD5-8154-662CED185127}"/>
-              </a:ext>
-            </a:extLst>
-          </p:cNvPr>
+            <a:endParaRPr lang="zh-CN" altLang="en-US"/>
+          </a:p>
+        </p:txBody>
+      </p:sp>
+      <p:sp>
+        <p:nvSpPr>
+          <p:cNvPr id="3" name="竖排文字占位符 2"/>
           <p:cNvSpPr>
             <a:spLocks noGrp="1"/>
           </p:cNvSpPr>
@@ -418,6 +367,7 @@
               <a:rPr lang="zh-CN" altLang="en-US"/>
               <a:t>单击此处编辑母版文本样式</a:t>
             </a:r>
+            <a:endParaRPr lang="zh-CN" altLang="en-US"/>
           </a:p>
           <a:p>
             <a:pPr lvl="1"/>
@@ -425,6 +375,7 @@
               <a:rPr lang="zh-CN" altLang="en-US"/>
               <a:t>二级</a:t>
             </a:r>
+            <a:endParaRPr lang="zh-CN" altLang="en-US"/>
           </a:p>
           <a:p>
             <a:pPr lvl="2"/>
@@ -432,6 +383,7 @@
               <a:rPr lang="zh-CN" altLang="en-US"/>
               <a:t>三级</a:t>
             </a:r>
+            <a:endParaRPr lang="zh-CN" altLang="en-US"/>
           </a:p>
           <a:p>
             <a:pPr lvl="3"/>
@@ -439,6 +391,7 @@
               <a:rPr lang="zh-CN" altLang="en-US"/>
               <a:t>四级</a:t>
             </a:r>
+            <a:endParaRPr lang="zh-CN" altLang="en-US"/>
           </a:p>
           <a:p>
             <a:pPr lvl="4"/>
@@ -446,18 +399,13 @@
               <a:rPr lang="zh-CN" altLang="en-US"/>
               <a:t>五级</a:t>
             </a:r>
-          </a:p>
-        </p:txBody>
-      </p:sp>
-      <p:sp>
-        <p:nvSpPr>
-          <p:cNvPr id="4" name="日期占位符 3">
-            <a:extLst>
-              <a:ext uri="{FF2B5EF4-FFF2-40B4-BE49-F238E27FC236}">
-                <a16:creationId xmlns:a16="http://schemas.microsoft.com/office/drawing/2014/main" id="{5F770116-86F8-49E2-8E23-669A71E8F925}"/>
-              </a:ext>
-            </a:extLst>
-          </p:cNvPr>
+            <a:endParaRPr lang="zh-CN" altLang="en-US"/>
+          </a:p>
+        </p:txBody>
+      </p:sp>
+      <p:sp>
+        <p:nvSpPr>
+          <p:cNvPr id="4" name="日期占位符 3"/>
           <p:cNvSpPr>
             <a:spLocks noGrp="1"/>
           </p:cNvSpPr>
@@ -472,7 +420,6 @@
           <a:p>
             <a:fld id="{75BAA5F5-FC70-4B12-A99D-83B1354032EB}" type="datetimeFigureOut">
               <a:rPr lang="zh-CN" altLang="en-US" smtClean="0"/>
-              <a:t>2020/10/30</a:t>
             </a:fld>
             <a:endParaRPr lang="zh-CN" altLang="en-US"/>
           </a:p>
@@ -480,13 +427,7 @@
       </p:sp>
       <p:sp>
         <p:nvSpPr>
-          <p:cNvPr id="5" name="页脚占位符 4">
-            <a:extLst>
-              <a:ext uri="{FF2B5EF4-FFF2-40B4-BE49-F238E27FC236}">
-                <a16:creationId xmlns:a16="http://schemas.microsoft.com/office/drawing/2014/main" id="{D1F00E16-D142-4F3E-9084-49D3FCCAD79E}"/>
-              </a:ext>
-            </a:extLst>
-          </p:cNvPr>
+          <p:cNvPr id="5" name="页脚占位符 4"/>
           <p:cNvSpPr>
             <a:spLocks noGrp="1"/>
           </p:cNvSpPr>
@@ -505,13 +446,7 @@
       </p:sp>
       <p:sp>
         <p:nvSpPr>
-          <p:cNvPr id="6" name="灯片编号占位符 5">
-            <a:extLst>
-              <a:ext uri="{FF2B5EF4-FFF2-40B4-BE49-F238E27FC236}">
-                <a16:creationId xmlns:a16="http://schemas.microsoft.com/office/drawing/2014/main" id="{0BA40E05-E06D-4B2A-93C7-97C429B74149}"/>
-              </a:ext>
-            </a:extLst>
-          </p:cNvPr>
+          <p:cNvPr id="6" name="灯片编号占位符 5"/>
           <p:cNvSpPr>
             <a:spLocks noGrp="1"/>
           </p:cNvSpPr>
@@ -526,18 +461,12 @@
           <a:p>
             <a:fld id="{1607E48A-8F5F-465B-A255-599B251FF974}" type="slidenum">
               <a:rPr lang="zh-CN" altLang="en-US" smtClean="0"/>
-              <a:t>‹#›</a:t>
             </a:fld>
             <a:endParaRPr lang="zh-CN" altLang="en-US"/>
           </a:p>
         </p:txBody>
       </p:sp>
     </p:spTree>
-    <p:extLst>
-      <p:ext uri="{BB962C8B-B14F-4D97-AF65-F5344CB8AC3E}">
-        <p14:creationId xmlns:p14="http://schemas.microsoft.com/office/powerpoint/2010/main" val="1896067026"/>
-      </p:ext>
-    </p:extLst>
   </p:cSld>
   <p:clrMapOvr>
     <a:masterClrMapping/>
@@ -564,13 +493,7 @@
       </p:grpSpPr>
       <p:sp>
         <p:nvSpPr>
-          <p:cNvPr id="2" name="竖排标题 1">
-            <a:extLst>
-              <a:ext uri="{FF2B5EF4-FFF2-40B4-BE49-F238E27FC236}">
-                <a16:creationId xmlns:a16="http://schemas.microsoft.com/office/drawing/2014/main" id="{B37E036E-95B5-4448-BBD7-2A2AC4076D27}"/>
-              </a:ext>
-            </a:extLst>
-          </p:cNvPr>
+          <p:cNvPr id="2" name="竖排标题 1"/>
           <p:cNvSpPr>
             <a:spLocks noGrp="1"/>
           </p:cNvSpPr>
@@ -592,18 +515,13 @@
               <a:rPr lang="zh-CN" altLang="en-US"/>
               <a:t>单击此处编辑母版标题样式</a:t>
             </a:r>
-          </a:p>
-        </p:txBody>
-      </p:sp>
-      <p:sp>
-        <p:nvSpPr>
-          <p:cNvPr id="3" name="竖排文字占位符 2">
-            <a:extLst>
-              <a:ext uri="{FF2B5EF4-FFF2-40B4-BE49-F238E27FC236}">
-                <a16:creationId xmlns:a16="http://schemas.microsoft.com/office/drawing/2014/main" id="{373B8BA3-F10A-4B0A-99ED-A626892064BE}"/>
-              </a:ext>
-            </a:extLst>
-          </p:cNvPr>
+            <a:endParaRPr lang="zh-CN" altLang="en-US"/>
+          </a:p>
+        </p:txBody>
+      </p:sp>
+      <p:sp>
+        <p:nvSpPr>
+          <p:cNvPr id="3" name="竖排文字占位符 2"/>
           <p:cNvSpPr>
             <a:spLocks noGrp="1"/>
           </p:cNvSpPr>
@@ -626,6 +544,7 @@
               <a:rPr lang="zh-CN" altLang="en-US"/>
               <a:t>单击此处编辑母版文本样式</a:t>
             </a:r>
+            <a:endParaRPr lang="zh-CN" altLang="en-US"/>
           </a:p>
           <a:p>
             <a:pPr lvl="1"/>
@@ -633,6 +552,7 @@
               <a:rPr lang="zh-CN" altLang="en-US"/>
               <a:t>二级</a:t>
             </a:r>
+            <a:endParaRPr lang="zh-CN" altLang="en-US"/>
           </a:p>
           <a:p>
             <a:pPr lvl="2"/>
@@ -640,6 +560,7 @@
               <a:rPr lang="zh-CN" altLang="en-US"/>
               <a:t>三级</a:t>
             </a:r>
+            <a:endParaRPr lang="zh-CN" altLang="en-US"/>
           </a:p>
           <a:p>
             <a:pPr lvl="3"/>
@@ -647,6 +568,7 @@
               <a:rPr lang="zh-CN" altLang="en-US"/>
               <a:t>四级</a:t>
             </a:r>
+            <a:endParaRPr lang="zh-CN" altLang="en-US"/>
           </a:p>
           <a:p>
             <a:pPr lvl="4"/>
@@ -654,18 +576,13 @@
               <a:rPr lang="zh-CN" altLang="en-US"/>
               <a:t>五级</a:t>
             </a:r>
-          </a:p>
-        </p:txBody>
-      </p:sp>
-      <p:sp>
-        <p:nvSpPr>
-          <p:cNvPr id="4" name="日期占位符 3">
-            <a:extLst>
-              <a:ext uri="{FF2B5EF4-FFF2-40B4-BE49-F238E27FC236}">
-                <a16:creationId xmlns:a16="http://schemas.microsoft.com/office/drawing/2014/main" id="{9B27C075-56EC-45DA-881A-A3B6A6222B54}"/>
-              </a:ext>
-            </a:extLst>
-          </p:cNvPr>
+            <a:endParaRPr lang="zh-CN" altLang="en-US"/>
+          </a:p>
+        </p:txBody>
+      </p:sp>
+      <p:sp>
+        <p:nvSpPr>
+          <p:cNvPr id="4" name="日期占位符 3"/>
           <p:cNvSpPr>
             <a:spLocks noGrp="1"/>
           </p:cNvSpPr>
@@ -680,7 +597,6 @@
           <a:p>
             <a:fld id="{75BAA5F5-FC70-4B12-A99D-83B1354032EB}" type="datetimeFigureOut">
               <a:rPr lang="zh-CN" altLang="en-US" smtClean="0"/>
-              <a:t>2020/10/30</a:t>
             </a:fld>
             <a:endParaRPr lang="zh-CN" altLang="en-US"/>
           </a:p>
@@ -688,13 +604,7 @@
       </p:sp>
       <p:sp>
         <p:nvSpPr>
-          <p:cNvPr id="5" name="页脚占位符 4">
-            <a:extLst>
-              <a:ext uri="{FF2B5EF4-FFF2-40B4-BE49-F238E27FC236}">
-                <a16:creationId xmlns:a16="http://schemas.microsoft.com/office/drawing/2014/main" id="{C4B65BE3-ED4F-4284-9211-D354CEA5CA43}"/>
-              </a:ext>
-            </a:extLst>
-          </p:cNvPr>
+          <p:cNvPr id="5" name="页脚占位符 4"/>
           <p:cNvSpPr>
             <a:spLocks noGrp="1"/>
           </p:cNvSpPr>
@@ -713,13 +623,7 @@
       </p:sp>
       <p:sp>
         <p:nvSpPr>
-          <p:cNvPr id="6" name="灯片编号占位符 5">
-            <a:extLst>
-              <a:ext uri="{FF2B5EF4-FFF2-40B4-BE49-F238E27FC236}">
-                <a16:creationId xmlns:a16="http://schemas.microsoft.com/office/drawing/2014/main" id="{4FCA9BB9-303D-498E-BD51-64AFA20B1C0B}"/>
-              </a:ext>
-            </a:extLst>
-          </p:cNvPr>
+          <p:cNvPr id="6" name="灯片编号占位符 5"/>
           <p:cNvSpPr>
             <a:spLocks noGrp="1"/>
           </p:cNvSpPr>
@@ -734,18 +638,12 @@
           <a:p>
             <a:fld id="{1607E48A-8F5F-465B-A255-599B251FF974}" type="slidenum">
               <a:rPr lang="zh-CN" altLang="en-US" smtClean="0"/>
-              <a:t>‹#›</a:t>
             </a:fld>
             <a:endParaRPr lang="zh-CN" altLang="en-US"/>
           </a:p>
         </p:txBody>
       </p:sp>
     </p:spTree>
-    <p:extLst>
-      <p:ext uri="{BB962C8B-B14F-4D97-AF65-F5344CB8AC3E}">
-        <p14:creationId xmlns:p14="http://schemas.microsoft.com/office/powerpoint/2010/main" val="299527000"/>
-      </p:ext>
-    </p:extLst>
   </p:cSld>
   <p:clrMapOvr>
     <a:masterClrMapping/>
@@ -772,13 +670,7 @@
       </p:grpSpPr>
       <p:sp>
         <p:nvSpPr>
-          <p:cNvPr id="2" name="标题 1">
-            <a:extLst>
-              <a:ext uri="{FF2B5EF4-FFF2-40B4-BE49-F238E27FC236}">
-                <a16:creationId xmlns:a16="http://schemas.microsoft.com/office/drawing/2014/main" id="{F94732F2-A9F5-4EDF-944C-03A1935E41D8}"/>
-              </a:ext>
-            </a:extLst>
-          </p:cNvPr>
+          <p:cNvPr id="2" name="标题 1"/>
           <p:cNvSpPr>
             <a:spLocks noGrp="1"/>
           </p:cNvSpPr>
@@ -795,18 +687,13 @@
               <a:rPr lang="zh-CN" altLang="en-US"/>
               <a:t>单击此处编辑母版标题样式</a:t>
             </a:r>
-          </a:p>
-        </p:txBody>
-      </p:sp>
-      <p:sp>
-        <p:nvSpPr>
-          <p:cNvPr id="3" name="内容占位符 2">
-            <a:extLst>
-              <a:ext uri="{FF2B5EF4-FFF2-40B4-BE49-F238E27FC236}">
-                <a16:creationId xmlns:a16="http://schemas.microsoft.com/office/drawing/2014/main" id="{23EAFCCD-06ED-45D4-8B83-960A52E20C8F}"/>
-              </a:ext>
-            </a:extLst>
-          </p:cNvPr>
+            <a:endParaRPr lang="zh-CN" altLang="en-US"/>
+          </a:p>
+        </p:txBody>
+      </p:sp>
+      <p:sp>
+        <p:nvSpPr>
+          <p:cNvPr id="3" name="内容占位符 2"/>
           <p:cNvSpPr>
             <a:spLocks noGrp="1"/>
           </p:cNvSpPr>
@@ -824,6 +711,7 @@
               <a:rPr lang="zh-CN" altLang="en-US"/>
               <a:t>单击此处编辑母版文本样式</a:t>
             </a:r>
+            <a:endParaRPr lang="zh-CN" altLang="en-US"/>
           </a:p>
           <a:p>
             <a:pPr lvl="1"/>
@@ -831,6 +719,7 @@
               <a:rPr lang="zh-CN" altLang="en-US"/>
               <a:t>二级</a:t>
             </a:r>
+            <a:endParaRPr lang="zh-CN" altLang="en-US"/>
           </a:p>
           <a:p>
             <a:pPr lvl="2"/>
@@ -838,6 +727,7 @@
               <a:rPr lang="zh-CN" altLang="en-US"/>
               <a:t>三级</a:t>
             </a:r>
+            <a:endParaRPr lang="zh-CN" altLang="en-US"/>
           </a:p>
           <a:p>
             <a:pPr lvl="3"/>
@@ -845,6 +735,7 @@
               <a:rPr lang="zh-CN" altLang="en-US"/>
               <a:t>四级</a:t>
             </a:r>
+            <a:endParaRPr lang="zh-CN" altLang="en-US"/>
           </a:p>
           <a:p>
             <a:pPr lvl="4"/>
@@ -852,18 +743,13 @@
               <a:rPr lang="zh-CN" altLang="en-US"/>
               <a:t>五级</a:t>
             </a:r>
-          </a:p>
-        </p:txBody>
-      </p:sp>
-      <p:sp>
-        <p:nvSpPr>
-          <p:cNvPr id="4" name="日期占位符 3">
-            <a:extLst>
-              <a:ext uri="{FF2B5EF4-FFF2-40B4-BE49-F238E27FC236}">
-                <a16:creationId xmlns:a16="http://schemas.microsoft.com/office/drawing/2014/main" id="{918EC00F-EC35-4E75-88D0-656129871A85}"/>
-              </a:ext>
-            </a:extLst>
-          </p:cNvPr>
+            <a:endParaRPr lang="zh-CN" altLang="en-US"/>
+          </a:p>
+        </p:txBody>
+      </p:sp>
+      <p:sp>
+        <p:nvSpPr>
+          <p:cNvPr id="4" name="日期占位符 3"/>
           <p:cNvSpPr>
             <a:spLocks noGrp="1"/>
           </p:cNvSpPr>
@@ -878,7 +764,6 @@
           <a:p>
             <a:fld id="{75BAA5F5-FC70-4B12-A99D-83B1354032EB}" type="datetimeFigureOut">
               <a:rPr lang="zh-CN" altLang="en-US" smtClean="0"/>
-              <a:t>2020/10/30</a:t>
             </a:fld>
             <a:endParaRPr lang="zh-CN" altLang="en-US"/>
           </a:p>
@@ -886,13 +771,7 @@
       </p:sp>
       <p:sp>
         <p:nvSpPr>
-          <p:cNvPr id="5" name="页脚占位符 4">
-            <a:extLst>
-              <a:ext uri="{FF2B5EF4-FFF2-40B4-BE49-F238E27FC236}">
-                <a16:creationId xmlns:a16="http://schemas.microsoft.com/office/drawing/2014/main" id="{034A7F05-7B53-4F1F-9430-F36CFF471EEE}"/>
-              </a:ext>
-            </a:extLst>
-          </p:cNvPr>
+          <p:cNvPr id="5" name="页脚占位符 4"/>
           <p:cNvSpPr>
             <a:spLocks noGrp="1"/>
           </p:cNvSpPr>
@@ -911,13 +790,7 @@
       </p:sp>
       <p:sp>
         <p:nvSpPr>
-          <p:cNvPr id="6" name="灯片编号占位符 5">
-            <a:extLst>
-              <a:ext uri="{FF2B5EF4-FFF2-40B4-BE49-F238E27FC236}">
-                <a16:creationId xmlns:a16="http://schemas.microsoft.com/office/drawing/2014/main" id="{91C784B4-5367-4D0E-9E8C-315B6485750F}"/>
-              </a:ext>
-            </a:extLst>
-          </p:cNvPr>
+          <p:cNvPr id="6" name="灯片编号占位符 5"/>
           <p:cNvSpPr>
             <a:spLocks noGrp="1"/>
           </p:cNvSpPr>
@@ -932,18 +805,12 @@
           <a:p>
             <a:fld id="{1607E48A-8F5F-465B-A255-599B251FF974}" type="slidenum">
               <a:rPr lang="zh-CN" altLang="en-US" smtClean="0"/>
-              <a:t>‹#›</a:t>
             </a:fld>
             <a:endParaRPr lang="zh-CN" altLang="en-US"/>
           </a:p>
         </p:txBody>
       </p:sp>
     </p:spTree>
-    <p:extLst>
-      <p:ext uri="{BB962C8B-B14F-4D97-AF65-F5344CB8AC3E}">
-        <p14:creationId xmlns:p14="http://schemas.microsoft.com/office/powerpoint/2010/main" val="369722044"/>
-      </p:ext>
-    </p:extLst>
   </p:cSld>
   <p:clrMapOvr>
     <a:masterClrMapping/>
@@ -970,13 +837,7 @@
       </p:grpSpPr>
       <p:sp>
         <p:nvSpPr>
-          <p:cNvPr id="2" name="标题 1">
-            <a:extLst>
-              <a:ext uri="{FF2B5EF4-FFF2-40B4-BE49-F238E27FC236}">
-                <a16:creationId xmlns:a16="http://schemas.microsoft.com/office/drawing/2014/main" id="{08561296-45C1-40AB-97BF-1DDB11AB27CD}"/>
-              </a:ext>
-            </a:extLst>
-          </p:cNvPr>
+          <p:cNvPr id="2" name="标题 1"/>
           <p:cNvSpPr>
             <a:spLocks noGrp="1"/>
           </p:cNvSpPr>
@@ -1002,18 +863,13 @@
               <a:rPr lang="zh-CN" altLang="en-US"/>
               <a:t>单击此处编辑母版标题样式</a:t>
             </a:r>
-          </a:p>
-        </p:txBody>
-      </p:sp>
-      <p:sp>
-        <p:nvSpPr>
-          <p:cNvPr id="3" name="文本占位符 2">
-            <a:extLst>
-              <a:ext uri="{FF2B5EF4-FFF2-40B4-BE49-F238E27FC236}">
-                <a16:creationId xmlns:a16="http://schemas.microsoft.com/office/drawing/2014/main" id="{FC187035-BA34-43AF-8CDF-4BEA0A18BE93}"/>
-              </a:ext>
-            </a:extLst>
-          </p:cNvPr>
+            <a:endParaRPr lang="zh-CN" altLang="en-US"/>
+          </a:p>
+        </p:txBody>
+      </p:sp>
+      <p:sp>
+        <p:nvSpPr>
+          <p:cNvPr id="3" name="文本占位符 2"/>
           <p:cNvSpPr>
             <a:spLocks noGrp="1"/>
           </p:cNvSpPr>
@@ -1127,18 +983,13 @@
               <a:rPr lang="zh-CN" altLang="en-US"/>
               <a:t>单击此处编辑母版文本样式</a:t>
             </a:r>
-          </a:p>
-        </p:txBody>
-      </p:sp>
-      <p:sp>
-        <p:nvSpPr>
-          <p:cNvPr id="4" name="日期占位符 3">
-            <a:extLst>
-              <a:ext uri="{FF2B5EF4-FFF2-40B4-BE49-F238E27FC236}">
-                <a16:creationId xmlns:a16="http://schemas.microsoft.com/office/drawing/2014/main" id="{5D7E22AF-E5A8-4ED5-B106-0B97F634B602}"/>
-              </a:ext>
-            </a:extLst>
-          </p:cNvPr>
+            <a:endParaRPr lang="zh-CN" altLang="en-US"/>
+          </a:p>
+        </p:txBody>
+      </p:sp>
+      <p:sp>
+        <p:nvSpPr>
+          <p:cNvPr id="4" name="日期占位符 3"/>
           <p:cNvSpPr>
             <a:spLocks noGrp="1"/>
           </p:cNvSpPr>
@@ -1153,7 +1004,6 @@
           <a:p>
             <a:fld id="{75BAA5F5-FC70-4B12-A99D-83B1354032EB}" type="datetimeFigureOut">
               <a:rPr lang="zh-CN" altLang="en-US" smtClean="0"/>
-              <a:t>2020/10/30</a:t>
             </a:fld>
             <a:endParaRPr lang="zh-CN" altLang="en-US"/>
           </a:p>
@@ -1161,13 +1011,7 @@
       </p:sp>
       <p:sp>
         <p:nvSpPr>
-          <p:cNvPr id="5" name="页脚占位符 4">
-            <a:extLst>
-              <a:ext uri="{FF2B5EF4-FFF2-40B4-BE49-F238E27FC236}">
-                <a16:creationId xmlns:a16="http://schemas.microsoft.com/office/drawing/2014/main" id="{19F81B30-8AE0-4A97-91CE-42C2C3A04AF8}"/>
-              </a:ext>
-            </a:extLst>
-          </p:cNvPr>
+          <p:cNvPr id="5" name="页脚占位符 4"/>
           <p:cNvSpPr>
             <a:spLocks noGrp="1"/>
           </p:cNvSpPr>
@@ -1186,13 +1030,7 @@
       </p:sp>
       <p:sp>
         <p:nvSpPr>
-          <p:cNvPr id="6" name="灯片编号占位符 5">
-            <a:extLst>
-              <a:ext uri="{FF2B5EF4-FFF2-40B4-BE49-F238E27FC236}">
-                <a16:creationId xmlns:a16="http://schemas.microsoft.com/office/drawing/2014/main" id="{33955E8D-2A0E-496B-93F7-40E761C2760C}"/>
-              </a:ext>
-            </a:extLst>
-          </p:cNvPr>
+          <p:cNvPr id="6" name="灯片编号占位符 5"/>
           <p:cNvSpPr>
             <a:spLocks noGrp="1"/>
           </p:cNvSpPr>
@@ -1207,18 +1045,12 @@
           <a:p>
             <a:fld id="{1607E48A-8F5F-465B-A255-599B251FF974}" type="slidenum">
               <a:rPr lang="zh-CN" altLang="en-US" smtClean="0"/>
-              <a:t>‹#›</a:t>
             </a:fld>
             <a:endParaRPr lang="zh-CN" altLang="en-US"/>
           </a:p>
         </p:txBody>
       </p:sp>
     </p:spTree>
-    <p:extLst>
-      <p:ext uri="{BB962C8B-B14F-4D97-AF65-F5344CB8AC3E}">
-        <p14:creationId xmlns:p14="http://schemas.microsoft.com/office/powerpoint/2010/main" val="2219741214"/>
-      </p:ext>
-    </p:extLst>
   </p:cSld>
   <p:clrMapOvr>
     <a:masterClrMapping/>
@@ -1245,13 +1077,7 @@
       </p:grpSpPr>
       <p:sp>
         <p:nvSpPr>
-          <p:cNvPr id="2" name="标题 1">
-            <a:extLst>
-              <a:ext uri="{FF2B5EF4-FFF2-40B4-BE49-F238E27FC236}">
-                <a16:creationId xmlns:a16="http://schemas.microsoft.com/office/drawing/2014/main" id="{49735286-BAAE-4791-B0A8-3421ED203153}"/>
-              </a:ext>
-            </a:extLst>
-          </p:cNvPr>
+          <p:cNvPr id="2" name="标题 1"/>
           <p:cNvSpPr>
             <a:spLocks noGrp="1"/>
           </p:cNvSpPr>
@@ -1268,18 +1094,13 @@
               <a:rPr lang="zh-CN" altLang="en-US"/>
               <a:t>单击此处编辑母版标题样式</a:t>
             </a:r>
-          </a:p>
-        </p:txBody>
-      </p:sp>
-      <p:sp>
-        <p:nvSpPr>
-          <p:cNvPr id="3" name="内容占位符 2">
-            <a:extLst>
-              <a:ext uri="{FF2B5EF4-FFF2-40B4-BE49-F238E27FC236}">
-                <a16:creationId xmlns:a16="http://schemas.microsoft.com/office/drawing/2014/main" id="{63326E29-4F2F-48F1-A7DE-711139B515F2}"/>
-              </a:ext>
-            </a:extLst>
-          </p:cNvPr>
+            <a:endParaRPr lang="zh-CN" altLang="en-US"/>
+          </a:p>
+        </p:txBody>
+      </p:sp>
+      <p:sp>
+        <p:nvSpPr>
+          <p:cNvPr id="3" name="内容占位符 2"/>
           <p:cNvSpPr>
             <a:spLocks noGrp="1"/>
           </p:cNvSpPr>
@@ -1302,6 +1123,7 @@
               <a:rPr lang="zh-CN" altLang="en-US"/>
               <a:t>单击此处编辑母版文本样式</a:t>
             </a:r>
+            <a:endParaRPr lang="zh-CN" altLang="en-US"/>
           </a:p>
           <a:p>
             <a:pPr lvl="1"/>
@@ -1309,6 +1131,7 @@
               <a:rPr lang="zh-CN" altLang="en-US"/>
               <a:t>二级</a:t>
             </a:r>
+            <a:endParaRPr lang="zh-CN" altLang="en-US"/>
           </a:p>
           <a:p>
             <a:pPr lvl="2"/>
@@ -1316,6 +1139,7 @@
               <a:rPr lang="zh-CN" altLang="en-US"/>
               <a:t>三级</a:t>
             </a:r>
+            <a:endParaRPr lang="zh-CN" altLang="en-US"/>
           </a:p>
           <a:p>
             <a:pPr lvl="3"/>
@@ -1323,6 +1147,7 @@
               <a:rPr lang="zh-CN" altLang="en-US"/>
               <a:t>四级</a:t>
             </a:r>
+            <a:endParaRPr lang="zh-CN" altLang="en-US"/>
           </a:p>
           <a:p>
             <a:pPr lvl="4"/>
@@ -1330,18 +1155,13 @@
               <a:rPr lang="zh-CN" altLang="en-US"/>
               <a:t>五级</a:t>
             </a:r>
-          </a:p>
-        </p:txBody>
-      </p:sp>
-      <p:sp>
-        <p:nvSpPr>
-          <p:cNvPr id="4" name="内容占位符 3">
-            <a:extLst>
-              <a:ext uri="{FF2B5EF4-FFF2-40B4-BE49-F238E27FC236}">
-                <a16:creationId xmlns:a16="http://schemas.microsoft.com/office/drawing/2014/main" id="{A93E6AAC-0986-445E-A2E1-EA8CB1BA9CE2}"/>
-              </a:ext>
-            </a:extLst>
-          </p:cNvPr>
+            <a:endParaRPr lang="zh-CN" altLang="en-US"/>
+          </a:p>
+        </p:txBody>
+      </p:sp>
+      <p:sp>
+        <p:nvSpPr>
+          <p:cNvPr id="4" name="内容占位符 3"/>
           <p:cNvSpPr>
             <a:spLocks noGrp="1"/>
           </p:cNvSpPr>
@@ -1364,6 +1184,7 @@
               <a:rPr lang="zh-CN" altLang="en-US"/>
               <a:t>单击此处编辑母版文本样式</a:t>
             </a:r>
+            <a:endParaRPr lang="zh-CN" altLang="en-US"/>
           </a:p>
           <a:p>
             <a:pPr lvl="1"/>
@@ -1371,6 +1192,7 @@
               <a:rPr lang="zh-CN" altLang="en-US"/>
               <a:t>二级</a:t>
             </a:r>
+            <a:endParaRPr lang="zh-CN" altLang="en-US"/>
           </a:p>
           <a:p>
             <a:pPr lvl="2"/>
@@ -1378,6 +1200,7 @@
               <a:rPr lang="zh-CN" altLang="en-US"/>
               <a:t>三级</a:t>
             </a:r>
+            <a:endParaRPr lang="zh-CN" altLang="en-US"/>
           </a:p>
           <a:p>
             <a:pPr lvl="3"/>
@@ -1385,6 +1208,7 @@
               <a:rPr lang="zh-CN" altLang="en-US"/>
               <a:t>四级</a:t>
             </a:r>
+            <a:endParaRPr lang="zh-CN" altLang="en-US"/>
           </a:p>
           <a:p>
             <a:pPr lvl="4"/>
@@ -1392,18 +1216,13 @@
               <a:rPr lang="zh-CN" altLang="en-US"/>
               <a:t>五级</a:t>
             </a:r>
-          </a:p>
-        </p:txBody>
-      </p:sp>
-      <p:sp>
-        <p:nvSpPr>
-          <p:cNvPr id="5" name="日期占位符 4">
-            <a:extLst>
-              <a:ext uri="{FF2B5EF4-FFF2-40B4-BE49-F238E27FC236}">
-                <a16:creationId xmlns:a16="http://schemas.microsoft.com/office/drawing/2014/main" id="{405F2804-67FF-4871-8BE9-0402EF8DB75D}"/>
-              </a:ext>
-            </a:extLst>
-          </p:cNvPr>
+            <a:endParaRPr lang="zh-CN" altLang="en-US"/>
+          </a:p>
+        </p:txBody>
+      </p:sp>
+      <p:sp>
+        <p:nvSpPr>
+          <p:cNvPr id="5" name="日期占位符 4"/>
           <p:cNvSpPr>
             <a:spLocks noGrp="1"/>
           </p:cNvSpPr>
@@ -1418,7 +1237,6 @@
           <a:p>
             <a:fld id="{75BAA5F5-FC70-4B12-A99D-83B1354032EB}" type="datetimeFigureOut">
               <a:rPr lang="zh-CN" altLang="en-US" smtClean="0"/>
-              <a:t>2020/10/30</a:t>
             </a:fld>
             <a:endParaRPr lang="zh-CN" altLang="en-US"/>
           </a:p>
@@ -1426,13 +1244,7 @@
       </p:sp>
       <p:sp>
         <p:nvSpPr>
-          <p:cNvPr id="6" name="页脚占位符 5">
-            <a:extLst>
-              <a:ext uri="{FF2B5EF4-FFF2-40B4-BE49-F238E27FC236}">
-                <a16:creationId xmlns:a16="http://schemas.microsoft.com/office/drawing/2014/main" id="{14788BE5-DF36-4E9A-9106-903DF77F09BB}"/>
-              </a:ext>
-            </a:extLst>
-          </p:cNvPr>
+          <p:cNvPr id="6" name="页脚占位符 5"/>
           <p:cNvSpPr>
             <a:spLocks noGrp="1"/>
           </p:cNvSpPr>
@@ -1451,13 +1263,7 @@
       </p:sp>
       <p:sp>
         <p:nvSpPr>
-          <p:cNvPr id="7" name="灯片编号占位符 6">
-            <a:extLst>
-              <a:ext uri="{FF2B5EF4-FFF2-40B4-BE49-F238E27FC236}">
-                <a16:creationId xmlns:a16="http://schemas.microsoft.com/office/drawing/2014/main" id="{953D3ED8-E41C-419F-A87C-1CFB79080AA9}"/>
-              </a:ext>
-            </a:extLst>
-          </p:cNvPr>
+          <p:cNvPr id="7" name="灯片编号占位符 6"/>
           <p:cNvSpPr>
             <a:spLocks noGrp="1"/>
           </p:cNvSpPr>
@@ -1472,18 +1278,12 @@
           <a:p>
             <a:fld id="{1607E48A-8F5F-465B-A255-599B251FF974}" type="slidenum">
               <a:rPr lang="zh-CN" altLang="en-US" smtClean="0"/>
-              <a:t>‹#›</a:t>
             </a:fld>
             <a:endParaRPr lang="zh-CN" altLang="en-US"/>
           </a:p>
         </p:txBody>
       </p:sp>
     </p:spTree>
-    <p:extLst>
-      <p:ext uri="{BB962C8B-B14F-4D97-AF65-F5344CB8AC3E}">
-        <p14:creationId xmlns:p14="http://schemas.microsoft.com/office/powerpoint/2010/main" val="1574816936"/>
-      </p:ext>
-    </p:extLst>
   </p:cSld>
   <p:clrMapOvr>
     <a:masterClrMapping/>
@@ -1510,13 +1310,7 @@
       </p:grpSpPr>
       <p:sp>
         <p:nvSpPr>
-          <p:cNvPr id="2" name="标题 1">
-            <a:extLst>
-              <a:ext uri="{FF2B5EF4-FFF2-40B4-BE49-F238E27FC236}">
-                <a16:creationId xmlns:a16="http://schemas.microsoft.com/office/drawing/2014/main" id="{F60C26E0-272D-4EA9-92CA-38B7389DD3CC}"/>
-              </a:ext>
-            </a:extLst>
-          </p:cNvPr>
+          <p:cNvPr id="2" name="标题 1"/>
           <p:cNvSpPr>
             <a:spLocks noGrp="1"/>
           </p:cNvSpPr>
@@ -1538,18 +1332,13 @@
               <a:rPr lang="zh-CN" altLang="en-US"/>
               <a:t>单击此处编辑母版标题样式</a:t>
             </a:r>
-          </a:p>
-        </p:txBody>
-      </p:sp>
-      <p:sp>
-        <p:nvSpPr>
-          <p:cNvPr id="3" name="文本占位符 2">
-            <a:extLst>
-              <a:ext uri="{FF2B5EF4-FFF2-40B4-BE49-F238E27FC236}">
-                <a16:creationId xmlns:a16="http://schemas.microsoft.com/office/drawing/2014/main" id="{7F278849-0F6F-4D71-A324-A45B8CB52463}"/>
-              </a:ext>
-            </a:extLst>
-          </p:cNvPr>
+            <a:endParaRPr lang="zh-CN" altLang="en-US"/>
+          </a:p>
+        </p:txBody>
+      </p:sp>
+      <p:sp>
+        <p:nvSpPr>
+          <p:cNvPr id="3" name="文本占位符 2"/>
           <p:cNvSpPr>
             <a:spLocks noGrp="1"/>
           </p:cNvSpPr>
@@ -1609,18 +1398,13 @@
               <a:rPr lang="zh-CN" altLang="en-US"/>
               <a:t>单击此处编辑母版文本样式</a:t>
             </a:r>
-          </a:p>
-        </p:txBody>
-      </p:sp>
-      <p:sp>
-        <p:nvSpPr>
-          <p:cNvPr id="4" name="内容占位符 3">
-            <a:extLst>
-              <a:ext uri="{FF2B5EF4-FFF2-40B4-BE49-F238E27FC236}">
-                <a16:creationId xmlns:a16="http://schemas.microsoft.com/office/drawing/2014/main" id="{476CECFA-A8D4-46FD-81D5-0995A4E54F85}"/>
-              </a:ext>
-            </a:extLst>
-          </p:cNvPr>
+            <a:endParaRPr lang="zh-CN" altLang="en-US"/>
+          </a:p>
+        </p:txBody>
+      </p:sp>
+      <p:sp>
+        <p:nvSpPr>
+          <p:cNvPr id="4" name="内容占位符 3"/>
           <p:cNvSpPr>
             <a:spLocks noGrp="1"/>
           </p:cNvSpPr>
@@ -1643,6 +1427,7 @@
               <a:rPr lang="zh-CN" altLang="en-US"/>
               <a:t>单击此处编辑母版文本样式</a:t>
             </a:r>
+            <a:endParaRPr lang="zh-CN" altLang="en-US"/>
           </a:p>
           <a:p>
             <a:pPr lvl="1"/>
@@ -1650,6 +1435,7 @@
               <a:rPr lang="zh-CN" altLang="en-US"/>
               <a:t>二级</a:t>
             </a:r>
+            <a:endParaRPr lang="zh-CN" altLang="en-US"/>
           </a:p>
           <a:p>
             <a:pPr lvl="2"/>
@@ -1657,6 +1443,7 @@
               <a:rPr lang="zh-CN" altLang="en-US"/>
               <a:t>三级</a:t>
             </a:r>
+            <a:endParaRPr lang="zh-CN" altLang="en-US"/>
           </a:p>
           <a:p>
             <a:pPr lvl="3"/>
@@ -1664,6 +1451,7 @@
               <a:rPr lang="zh-CN" altLang="en-US"/>
               <a:t>四级</a:t>
             </a:r>
+            <a:endParaRPr lang="zh-CN" altLang="en-US"/>
           </a:p>
           <a:p>
             <a:pPr lvl="4"/>
@@ -1671,18 +1459,13 @@
               <a:rPr lang="zh-CN" altLang="en-US"/>
               <a:t>五级</a:t>
             </a:r>
-          </a:p>
-        </p:txBody>
-      </p:sp>
-      <p:sp>
-        <p:nvSpPr>
-          <p:cNvPr id="5" name="文本占位符 4">
-            <a:extLst>
-              <a:ext uri="{FF2B5EF4-FFF2-40B4-BE49-F238E27FC236}">
-                <a16:creationId xmlns:a16="http://schemas.microsoft.com/office/drawing/2014/main" id="{662C233A-AA9C-4E38-AE2D-9E8FC4FD01E7}"/>
-              </a:ext>
-            </a:extLst>
-          </p:cNvPr>
+            <a:endParaRPr lang="zh-CN" altLang="en-US"/>
+          </a:p>
+        </p:txBody>
+      </p:sp>
+      <p:sp>
+        <p:nvSpPr>
+          <p:cNvPr id="5" name="文本占位符 4"/>
           <p:cNvSpPr>
             <a:spLocks noGrp="1"/>
           </p:cNvSpPr>
@@ -1742,18 +1525,13 @@
               <a:rPr lang="zh-CN" altLang="en-US"/>
               <a:t>单击此处编辑母版文本样式</a:t>
             </a:r>
-          </a:p>
-        </p:txBody>
-      </p:sp>
-      <p:sp>
-        <p:nvSpPr>
-          <p:cNvPr id="6" name="内容占位符 5">
-            <a:extLst>
-              <a:ext uri="{FF2B5EF4-FFF2-40B4-BE49-F238E27FC236}">
-                <a16:creationId xmlns:a16="http://schemas.microsoft.com/office/drawing/2014/main" id="{6A5B0226-C39C-419A-9CB3-92C55952A33C}"/>
-              </a:ext>
-            </a:extLst>
-          </p:cNvPr>
+            <a:endParaRPr lang="zh-CN" altLang="en-US"/>
+          </a:p>
+        </p:txBody>
+      </p:sp>
+      <p:sp>
+        <p:nvSpPr>
+          <p:cNvPr id="6" name="内容占位符 5"/>
           <p:cNvSpPr>
             <a:spLocks noGrp="1"/>
           </p:cNvSpPr>
@@ -1776,6 +1554,7 @@
               <a:rPr lang="zh-CN" altLang="en-US"/>
               <a:t>单击此处编辑母版文本样式</a:t>
             </a:r>
+            <a:endParaRPr lang="zh-CN" altLang="en-US"/>
           </a:p>
           <a:p>
             <a:pPr lvl="1"/>
@@ -1783,6 +1562,7 @@
               <a:rPr lang="zh-CN" altLang="en-US"/>
               <a:t>二级</a:t>
             </a:r>
+            <a:endParaRPr lang="zh-CN" altLang="en-US"/>
           </a:p>
           <a:p>
             <a:pPr lvl="2"/>
@@ -1790,6 +1570,7 @@
               <a:rPr lang="zh-CN" altLang="en-US"/>
               <a:t>三级</a:t>
             </a:r>
+            <a:endParaRPr lang="zh-CN" altLang="en-US"/>
           </a:p>
           <a:p>
             <a:pPr lvl="3"/>
@@ -1797,6 +1578,7 @@
               <a:rPr lang="zh-CN" altLang="en-US"/>
               <a:t>四级</a:t>
             </a:r>
+            <a:endParaRPr lang="zh-CN" altLang="en-US"/>
           </a:p>
           <a:p>
             <a:pPr lvl="4"/>
@@ -1804,18 +1586,13 @@
               <a:rPr lang="zh-CN" altLang="en-US"/>
               <a:t>五级</a:t>
             </a:r>
-          </a:p>
-        </p:txBody>
-      </p:sp>
-      <p:sp>
-        <p:nvSpPr>
-          <p:cNvPr id="7" name="日期占位符 6">
-            <a:extLst>
-              <a:ext uri="{FF2B5EF4-FFF2-40B4-BE49-F238E27FC236}">
-                <a16:creationId xmlns:a16="http://schemas.microsoft.com/office/drawing/2014/main" id="{EFF93CF2-1E37-49A2-953C-181F2FCB4B01}"/>
-              </a:ext>
-            </a:extLst>
-          </p:cNvPr>
+            <a:endParaRPr lang="zh-CN" altLang="en-US"/>
+          </a:p>
+        </p:txBody>
+      </p:sp>
+      <p:sp>
+        <p:nvSpPr>
+          <p:cNvPr id="7" name="日期占位符 6"/>
           <p:cNvSpPr>
             <a:spLocks noGrp="1"/>
           </p:cNvSpPr>
@@ -1830,7 +1607,6 @@
           <a:p>
             <a:fld id="{75BAA5F5-FC70-4B12-A99D-83B1354032EB}" type="datetimeFigureOut">
               <a:rPr lang="zh-CN" altLang="en-US" smtClean="0"/>
-              <a:t>2020/10/30</a:t>
             </a:fld>
             <a:endParaRPr lang="zh-CN" altLang="en-US"/>
           </a:p>
@@ -1838,13 +1614,7 @@
       </p:sp>
       <p:sp>
         <p:nvSpPr>
-          <p:cNvPr id="8" name="页脚占位符 7">
-            <a:extLst>
-              <a:ext uri="{FF2B5EF4-FFF2-40B4-BE49-F238E27FC236}">
-                <a16:creationId xmlns:a16="http://schemas.microsoft.com/office/drawing/2014/main" id="{94307463-BC3C-4CE8-BF7F-BC020FA4A295}"/>
-              </a:ext>
-            </a:extLst>
-          </p:cNvPr>
+          <p:cNvPr id="8" name="页脚占位符 7"/>
           <p:cNvSpPr>
             <a:spLocks noGrp="1"/>
           </p:cNvSpPr>
@@ -1863,13 +1633,7 @@
       </p:sp>
       <p:sp>
         <p:nvSpPr>
-          <p:cNvPr id="9" name="灯片编号占位符 8">
-            <a:extLst>
-              <a:ext uri="{FF2B5EF4-FFF2-40B4-BE49-F238E27FC236}">
-                <a16:creationId xmlns:a16="http://schemas.microsoft.com/office/drawing/2014/main" id="{94EB5969-CBF3-4E85-ACB5-E9D2C987C7B5}"/>
-              </a:ext>
-            </a:extLst>
-          </p:cNvPr>
+          <p:cNvPr id="9" name="灯片编号占位符 8"/>
           <p:cNvSpPr>
             <a:spLocks noGrp="1"/>
           </p:cNvSpPr>
@@ -1884,18 +1648,12 @@
           <a:p>
             <a:fld id="{1607E48A-8F5F-465B-A255-599B251FF974}" type="slidenum">
               <a:rPr lang="zh-CN" altLang="en-US" smtClean="0"/>
-              <a:t>‹#›</a:t>
             </a:fld>
             <a:endParaRPr lang="zh-CN" altLang="en-US"/>
           </a:p>
         </p:txBody>
       </p:sp>
     </p:spTree>
-    <p:extLst>
-      <p:ext uri="{BB962C8B-B14F-4D97-AF65-F5344CB8AC3E}">
-        <p14:creationId xmlns:p14="http://schemas.microsoft.com/office/powerpoint/2010/main" val="921979825"/>
-      </p:ext>
-    </p:extLst>
   </p:cSld>
   <p:clrMapOvr>
     <a:masterClrMapping/>
@@ -1922,13 +1680,7 @@
       </p:grpSpPr>
       <p:sp>
         <p:nvSpPr>
-          <p:cNvPr id="2" name="标题 1">
-            <a:extLst>
-              <a:ext uri="{FF2B5EF4-FFF2-40B4-BE49-F238E27FC236}">
-                <a16:creationId xmlns:a16="http://schemas.microsoft.com/office/drawing/2014/main" id="{92C7ADDA-5F89-4E07-9F5D-EC777DDAE199}"/>
-              </a:ext>
-            </a:extLst>
-          </p:cNvPr>
+          <p:cNvPr id="2" name="标题 1"/>
           <p:cNvSpPr>
             <a:spLocks noGrp="1"/>
           </p:cNvSpPr>
@@ -1945,18 +1697,13 @@
               <a:rPr lang="zh-CN" altLang="en-US"/>
               <a:t>单击此处编辑母版标题样式</a:t>
             </a:r>
-          </a:p>
-        </p:txBody>
-      </p:sp>
-      <p:sp>
-        <p:nvSpPr>
-          <p:cNvPr id="3" name="日期占位符 2">
-            <a:extLst>
-              <a:ext uri="{FF2B5EF4-FFF2-40B4-BE49-F238E27FC236}">
-                <a16:creationId xmlns:a16="http://schemas.microsoft.com/office/drawing/2014/main" id="{08EA4BE1-3124-4DF3-95BD-7C6443FB602D}"/>
-              </a:ext>
-            </a:extLst>
-          </p:cNvPr>
+            <a:endParaRPr lang="zh-CN" altLang="en-US"/>
+          </a:p>
+        </p:txBody>
+      </p:sp>
+      <p:sp>
+        <p:nvSpPr>
+          <p:cNvPr id="3" name="日期占位符 2"/>
           <p:cNvSpPr>
             <a:spLocks noGrp="1"/>
           </p:cNvSpPr>
@@ -1971,7 +1718,6 @@
           <a:p>
             <a:fld id="{75BAA5F5-FC70-4B12-A99D-83B1354032EB}" type="datetimeFigureOut">
               <a:rPr lang="zh-CN" altLang="en-US" smtClean="0"/>
-              <a:t>2020/10/30</a:t>
             </a:fld>
             <a:endParaRPr lang="zh-CN" altLang="en-US"/>
           </a:p>
@@ -1979,13 +1725,7 @@
       </p:sp>
       <p:sp>
         <p:nvSpPr>
-          <p:cNvPr id="4" name="页脚占位符 3">
-            <a:extLst>
-              <a:ext uri="{FF2B5EF4-FFF2-40B4-BE49-F238E27FC236}">
-                <a16:creationId xmlns:a16="http://schemas.microsoft.com/office/drawing/2014/main" id="{DBFF6074-BD3F-4E1B-B518-810B11724121}"/>
-              </a:ext>
-            </a:extLst>
-          </p:cNvPr>
+          <p:cNvPr id="4" name="页脚占位符 3"/>
           <p:cNvSpPr>
             <a:spLocks noGrp="1"/>
           </p:cNvSpPr>
@@ -2004,13 +1744,7 @@
       </p:sp>
       <p:sp>
         <p:nvSpPr>
-          <p:cNvPr id="5" name="灯片编号占位符 4">
-            <a:extLst>
-              <a:ext uri="{FF2B5EF4-FFF2-40B4-BE49-F238E27FC236}">
-                <a16:creationId xmlns:a16="http://schemas.microsoft.com/office/drawing/2014/main" id="{15731F41-B55B-4935-AA8F-202BC21DFC12}"/>
-              </a:ext>
-            </a:extLst>
-          </p:cNvPr>
+          <p:cNvPr id="5" name="灯片编号占位符 4"/>
           <p:cNvSpPr>
             <a:spLocks noGrp="1"/>
           </p:cNvSpPr>
@@ -2025,18 +1759,12 @@
           <a:p>
             <a:fld id="{1607E48A-8F5F-465B-A255-599B251FF974}" type="slidenum">
               <a:rPr lang="zh-CN" altLang="en-US" smtClean="0"/>
-              <a:t>‹#›</a:t>
             </a:fld>
             <a:endParaRPr lang="zh-CN" altLang="en-US"/>
           </a:p>
         </p:txBody>
       </p:sp>
     </p:spTree>
-    <p:extLst>
-      <p:ext uri="{BB962C8B-B14F-4D97-AF65-F5344CB8AC3E}">
-        <p14:creationId xmlns:p14="http://schemas.microsoft.com/office/powerpoint/2010/main" val="1985842185"/>
-      </p:ext>
-    </p:extLst>
   </p:cSld>
   <p:clrMapOvr>
     <a:masterClrMapping/>
@@ -2063,13 +1791,7 @@
       </p:grpSpPr>
       <p:sp>
         <p:nvSpPr>
-          <p:cNvPr id="2" name="日期占位符 1">
-            <a:extLst>
-              <a:ext uri="{FF2B5EF4-FFF2-40B4-BE49-F238E27FC236}">
-                <a16:creationId xmlns:a16="http://schemas.microsoft.com/office/drawing/2014/main" id="{1146FBDA-AA7B-4C8B-B027-41B253B5920C}"/>
-              </a:ext>
-            </a:extLst>
-          </p:cNvPr>
+          <p:cNvPr id="2" name="日期占位符 1"/>
           <p:cNvSpPr>
             <a:spLocks noGrp="1"/>
           </p:cNvSpPr>
@@ -2084,7 +1806,6 @@
           <a:p>
             <a:fld id="{75BAA5F5-FC70-4B12-A99D-83B1354032EB}" type="datetimeFigureOut">
               <a:rPr lang="zh-CN" altLang="en-US" smtClean="0"/>
-              <a:t>2020/10/30</a:t>
             </a:fld>
             <a:endParaRPr lang="zh-CN" altLang="en-US"/>
           </a:p>
@@ -2092,13 +1813,7 @@
       </p:sp>
       <p:sp>
         <p:nvSpPr>
-          <p:cNvPr id="3" name="页脚占位符 2">
-            <a:extLst>
-              <a:ext uri="{FF2B5EF4-FFF2-40B4-BE49-F238E27FC236}">
-                <a16:creationId xmlns:a16="http://schemas.microsoft.com/office/drawing/2014/main" id="{AFF7B6AD-2DEC-4F70-8703-A20352475940}"/>
-              </a:ext>
-            </a:extLst>
-          </p:cNvPr>
+          <p:cNvPr id="3" name="页脚占位符 2"/>
           <p:cNvSpPr>
             <a:spLocks noGrp="1"/>
           </p:cNvSpPr>
@@ -2117,13 +1832,7 @@
       </p:sp>
       <p:sp>
         <p:nvSpPr>
-          <p:cNvPr id="4" name="灯片编号占位符 3">
-            <a:extLst>
-              <a:ext uri="{FF2B5EF4-FFF2-40B4-BE49-F238E27FC236}">
-                <a16:creationId xmlns:a16="http://schemas.microsoft.com/office/drawing/2014/main" id="{7CFCA318-C1F1-4CF0-A682-53F4320D1C8B}"/>
-              </a:ext>
-            </a:extLst>
-          </p:cNvPr>
+          <p:cNvPr id="4" name="灯片编号占位符 3"/>
           <p:cNvSpPr>
             <a:spLocks noGrp="1"/>
           </p:cNvSpPr>
@@ -2138,18 +1847,12 @@
           <a:p>
             <a:fld id="{1607E48A-8F5F-465B-A255-599B251FF974}" type="slidenum">
               <a:rPr lang="zh-CN" altLang="en-US" smtClean="0"/>
-              <a:t>‹#›</a:t>
             </a:fld>
             <a:endParaRPr lang="zh-CN" altLang="en-US"/>
           </a:p>
         </p:txBody>
       </p:sp>
     </p:spTree>
-    <p:extLst>
-      <p:ext uri="{BB962C8B-B14F-4D97-AF65-F5344CB8AC3E}">
-        <p14:creationId xmlns:p14="http://schemas.microsoft.com/office/powerpoint/2010/main" val="281525375"/>
-      </p:ext>
-    </p:extLst>
   </p:cSld>
   <p:clrMapOvr>
     <a:masterClrMapping/>
@@ -2176,13 +1879,7 @@
       </p:grpSpPr>
       <p:sp>
         <p:nvSpPr>
-          <p:cNvPr id="2" name="标题 1">
-            <a:extLst>
-              <a:ext uri="{FF2B5EF4-FFF2-40B4-BE49-F238E27FC236}">
-                <a16:creationId xmlns:a16="http://schemas.microsoft.com/office/drawing/2014/main" id="{B597214A-EB8E-4946-8492-6B1442429A90}"/>
-              </a:ext>
-            </a:extLst>
-          </p:cNvPr>
+          <p:cNvPr id="2" name="标题 1"/>
           <p:cNvSpPr>
             <a:spLocks noGrp="1"/>
           </p:cNvSpPr>
@@ -2208,18 +1905,13 @@
               <a:rPr lang="zh-CN" altLang="en-US"/>
               <a:t>单击此处编辑母版标题样式</a:t>
             </a:r>
-          </a:p>
-        </p:txBody>
-      </p:sp>
-      <p:sp>
-        <p:nvSpPr>
-          <p:cNvPr id="3" name="内容占位符 2">
-            <a:extLst>
-              <a:ext uri="{FF2B5EF4-FFF2-40B4-BE49-F238E27FC236}">
-                <a16:creationId xmlns:a16="http://schemas.microsoft.com/office/drawing/2014/main" id="{2F3DEAC0-02AC-4490-A255-D1BF1DB30C0D}"/>
-              </a:ext>
-            </a:extLst>
-          </p:cNvPr>
+            <a:endParaRPr lang="zh-CN" altLang="en-US"/>
+          </a:p>
+        </p:txBody>
+      </p:sp>
+      <p:sp>
+        <p:nvSpPr>
+          <p:cNvPr id="3" name="内容占位符 2"/>
           <p:cNvSpPr>
             <a:spLocks noGrp="1"/>
           </p:cNvSpPr>
@@ -2270,6 +1962,7 @@
               <a:rPr lang="zh-CN" altLang="en-US"/>
               <a:t>单击此处编辑母版文本样式</a:t>
             </a:r>
+            <a:endParaRPr lang="zh-CN" altLang="en-US"/>
           </a:p>
           <a:p>
             <a:pPr lvl="1"/>
@@ -2277,6 +1970,7 @@
               <a:rPr lang="zh-CN" altLang="en-US"/>
               <a:t>二级</a:t>
             </a:r>
+            <a:endParaRPr lang="zh-CN" altLang="en-US"/>
           </a:p>
           <a:p>
             <a:pPr lvl="2"/>
@@ -2284,6 +1978,7 @@
               <a:rPr lang="zh-CN" altLang="en-US"/>
               <a:t>三级</a:t>
             </a:r>
+            <a:endParaRPr lang="zh-CN" altLang="en-US"/>
           </a:p>
           <a:p>
             <a:pPr lvl="3"/>
@@ -2291,6 +1986,7 @@
               <a:rPr lang="zh-CN" altLang="en-US"/>
               <a:t>四级</a:t>
             </a:r>
+            <a:endParaRPr lang="zh-CN" altLang="en-US"/>
           </a:p>
           <a:p>
             <a:pPr lvl="4"/>
@@ -2298,18 +1994,13 @@
               <a:rPr lang="zh-CN" altLang="en-US"/>
               <a:t>五级</a:t>
             </a:r>
-          </a:p>
-        </p:txBody>
-      </p:sp>
-      <p:sp>
-        <p:nvSpPr>
-          <p:cNvPr id="4" name="文本占位符 3">
-            <a:extLst>
-              <a:ext uri="{FF2B5EF4-FFF2-40B4-BE49-F238E27FC236}">
-                <a16:creationId xmlns:a16="http://schemas.microsoft.com/office/drawing/2014/main" id="{16615C45-84E1-4F6F-9811-1447997505B2}"/>
-              </a:ext>
-            </a:extLst>
-          </p:cNvPr>
+            <a:endParaRPr lang="zh-CN" altLang="en-US"/>
+          </a:p>
+        </p:txBody>
+      </p:sp>
+      <p:sp>
+        <p:nvSpPr>
+          <p:cNvPr id="4" name="文本占位符 3"/>
           <p:cNvSpPr>
             <a:spLocks noGrp="1"/>
           </p:cNvSpPr>
@@ -2369,18 +2060,13 @@
               <a:rPr lang="zh-CN" altLang="en-US"/>
               <a:t>单击此处编辑母版文本样式</a:t>
             </a:r>
-          </a:p>
-        </p:txBody>
-      </p:sp>
-      <p:sp>
-        <p:nvSpPr>
-          <p:cNvPr id="5" name="日期占位符 4">
-            <a:extLst>
-              <a:ext uri="{FF2B5EF4-FFF2-40B4-BE49-F238E27FC236}">
-                <a16:creationId xmlns:a16="http://schemas.microsoft.com/office/drawing/2014/main" id="{BBD22EBF-45E8-4CA9-A025-78A44DA4D573}"/>
-              </a:ext>
-            </a:extLst>
-          </p:cNvPr>
+            <a:endParaRPr lang="zh-CN" altLang="en-US"/>
+          </a:p>
+        </p:txBody>
+      </p:sp>
+      <p:sp>
+        <p:nvSpPr>
+          <p:cNvPr id="5" name="日期占位符 4"/>
           <p:cNvSpPr>
             <a:spLocks noGrp="1"/>
           </p:cNvSpPr>
@@ -2395,7 +2081,6 @@
           <a:p>
             <a:fld id="{75BAA5F5-FC70-4B12-A99D-83B1354032EB}" type="datetimeFigureOut">
               <a:rPr lang="zh-CN" altLang="en-US" smtClean="0"/>
-              <a:t>2020/10/30</a:t>
             </a:fld>
             <a:endParaRPr lang="zh-CN" altLang="en-US"/>
           </a:p>
@@ -2403,13 +2088,7 @@
       </p:sp>
       <p:sp>
         <p:nvSpPr>
-          <p:cNvPr id="6" name="页脚占位符 5">
-            <a:extLst>
-              <a:ext uri="{FF2B5EF4-FFF2-40B4-BE49-F238E27FC236}">
-                <a16:creationId xmlns:a16="http://schemas.microsoft.com/office/drawing/2014/main" id="{5AA49382-FD00-4722-8609-4D2CE46B0D42}"/>
-              </a:ext>
-            </a:extLst>
-          </p:cNvPr>
+          <p:cNvPr id="6" name="页脚占位符 5"/>
           <p:cNvSpPr>
             <a:spLocks noGrp="1"/>
           </p:cNvSpPr>
@@ -2428,13 +2107,7 @@
       </p:sp>
       <p:sp>
         <p:nvSpPr>
-          <p:cNvPr id="7" name="灯片编号占位符 6">
-            <a:extLst>
-              <a:ext uri="{FF2B5EF4-FFF2-40B4-BE49-F238E27FC236}">
-                <a16:creationId xmlns:a16="http://schemas.microsoft.com/office/drawing/2014/main" id="{AD532D74-D153-46CB-9057-31431EC4278D}"/>
-              </a:ext>
-            </a:extLst>
-          </p:cNvPr>
+          <p:cNvPr id="7" name="灯片编号占位符 6"/>
           <p:cNvSpPr>
             <a:spLocks noGrp="1"/>
           </p:cNvSpPr>
@@ -2449,18 +2122,12 @@
           <a:p>
             <a:fld id="{1607E48A-8F5F-465B-A255-599B251FF974}" type="slidenum">
               <a:rPr lang="zh-CN" altLang="en-US" smtClean="0"/>
-              <a:t>‹#›</a:t>
             </a:fld>
             <a:endParaRPr lang="zh-CN" altLang="en-US"/>
           </a:p>
         </p:txBody>
       </p:sp>
     </p:spTree>
-    <p:extLst>
-      <p:ext uri="{BB962C8B-B14F-4D97-AF65-F5344CB8AC3E}">
-        <p14:creationId xmlns:p14="http://schemas.microsoft.com/office/powerpoint/2010/main" val="2106483457"/>
-      </p:ext>
-    </p:extLst>
   </p:cSld>
   <p:clrMapOvr>
     <a:masterClrMapping/>
@@ -2487,13 +2154,7 @@
       </p:grpSpPr>
       <p:sp>
         <p:nvSpPr>
-          <p:cNvPr id="2" name="标题 1">
-            <a:extLst>
-              <a:ext uri="{FF2B5EF4-FFF2-40B4-BE49-F238E27FC236}">
-                <a16:creationId xmlns:a16="http://schemas.microsoft.com/office/drawing/2014/main" id="{CFCCDF96-24CF-4B78-903F-07E4A9C95531}"/>
-              </a:ext>
-            </a:extLst>
-          </p:cNvPr>
+          <p:cNvPr id="2" name="标题 1"/>
           <p:cNvSpPr>
             <a:spLocks noGrp="1"/>
           </p:cNvSpPr>
@@ -2519,18 +2180,13 @@
               <a:rPr lang="zh-CN" altLang="en-US"/>
               <a:t>单击此处编辑母版标题样式</a:t>
             </a:r>
-          </a:p>
-        </p:txBody>
-      </p:sp>
-      <p:sp>
-        <p:nvSpPr>
-          <p:cNvPr id="3" name="图片占位符 2">
-            <a:extLst>
-              <a:ext uri="{FF2B5EF4-FFF2-40B4-BE49-F238E27FC236}">
-                <a16:creationId xmlns:a16="http://schemas.microsoft.com/office/drawing/2014/main" id="{A97977F1-28BB-4371-9DE4-87B4006A72B0}"/>
-              </a:ext>
-            </a:extLst>
-          </p:cNvPr>
+            <a:endParaRPr lang="zh-CN" altLang="en-US"/>
+          </a:p>
+        </p:txBody>
+      </p:sp>
+      <p:sp>
+        <p:nvSpPr>
+          <p:cNvPr id="3" name="图片占位符 2"/>
           <p:cNvSpPr>
             <a:spLocks noGrp="1"/>
           </p:cNvSpPr>
@@ -2591,13 +2247,7 @@
       </p:sp>
       <p:sp>
         <p:nvSpPr>
-          <p:cNvPr id="4" name="文本占位符 3">
-            <a:extLst>
-              <a:ext uri="{FF2B5EF4-FFF2-40B4-BE49-F238E27FC236}">
-                <a16:creationId xmlns:a16="http://schemas.microsoft.com/office/drawing/2014/main" id="{E80EA054-E127-4F0E-87EE-0899F76378CB}"/>
-              </a:ext>
-            </a:extLst>
-          </p:cNvPr>
+          <p:cNvPr id="4" name="文本占位符 3"/>
           <p:cNvSpPr>
             <a:spLocks noGrp="1"/>
           </p:cNvSpPr>
@@ -2657,18 +2307,13 @@
               <a:rPr lang="zh-CN" altLang="en-US"/>
               <a:t>单击此处编辑母版文本样式</a:t>
             </a:r>
-          </a:p>
-        </p:txBody>
-      </p:sp>
-      <p:sp>
-        <p:nvSpPr>
-          <p:cNvPr id="5" name="日期占位符 4">
-            <a:extLst>
-              <a:ext uri="{FF2B5EF4-FFF2-40B4-BE49-F238E27FC236}">
-                <a16:creationId xmlns:a16="http://schemas.microsoft.com/office/drawing/2014/main" id="{4558450D-B738-45B4-BE39-AA9C8EF70F07}"/>
-              </a:ext>
-            </a:extLst>
-          </p:cNvPr>
+            <a:endParaRPr lang="zh-CN" altLang="en-US"/>
+          </a:p>
+        </p:txBody>
+      </p:sp>
+      <p:sp>
+        <p:nvSpPr>
+          <p:cNvPr id="5" name="日期占位符 4"/>
           <p:cNvSpPr>
             <a:spLocks noGrp="1"/>
           </p:cNvSpPr>
@@ -2683,7 +2328,6 @@
           <a:p>
             <a:fld id="{75BAA5F5-FC70-4B12-A99D-83B1354032EB}" type="datetimeFigureOut">
               <a:rPr lang="zh-CN" altLang="en-US" smtClean="0"/>
-              <a:t>2020/10/30</a:t>
             </a:fld>
             <a:endParaRPr lang="zh-CN" altLang="en-US"/>
           </a:p>
@@ -2691,13 +2335,7 @@
       </p:sp>
       <p:sp>
         <p:nvSpPr>
-          <p:cNvPr id="6" name="页脚占位符 5">
-            <a:extLst>
-              <a:ext uri="{FF2B5EF4-FFF2-40B4-BE49-F238E27FC236}">
-                <a16:creationId xmlns:a16="http://schemas.microsoft.com/office/drawing/2014/main" id="{CAC73248-0365-4682-9082-ED14DAB9EC6C}"/>
-              </a:ext>
-            </a:extLst>
-          </p:cNvPr>
+          <p:cNvPr id="6" name="页脚占位符 5"/>
           <p:cNvSpPr>
             <a:spLocks noGrp="1"/>
           </p:cNvSpPr>
@@ -2716,13 +2354,7 @@
       </p:sp>
       <p:sp>
         <p:nvSpPr>
-          <p:cNvPr id="7" name="灯片编号占位符 6">
-            <a:extLst>
-              <a:ext uri="{FF2B5EF4-FFF2-40B4-BE49-F238E27FC236}">
-                <a16:creationId xmlns:a16="http://schemas.microsoft.com/office/drawing/2014/main" id="{E2ABC4B3-C7B8-4E4E-8676-E1941F9201B9}"/>
-              </a:ext>
-            </a:extLst>
-          </p:cNvPr>
+          <p:cNvPr id="7" name="灯片编号占位符 6"/>
           <p:cNvSpPr>
             <a:spLocks noGrp="1"/>
           </p:cNvSpPr>
@@ -2737,18 +2369,12 @@
           <a:p>
             <a:fld id="{1607E48A-8F5F-465B-A255-599B251FF974}" type="slidenum">
               <a:rPr lang="zh-CN" altLang="en-US" smtClean="0"/>
-              <a:t>‹#›</a:t>
             </a:fld>
             <a:endParaRPr lang="zh-CN" altLang="en-US"/>
           </a:p>
         </p:txBody>
       </p:sp>
     </p:spTree>
-    <p:extLst>
-      <p:ext uri="{BB962C8B-B14F-4D97-AF65-F5344CB8AC3E}">
-        <p14:creationId xmlns:p14="http://schemas.microsoft.com/office/powerpoint/2010/main" val="1969834221"/>
-      </p:ext>
-    </p:extLst>
   </p:cSld>
   <p:clrMapOvr>
     <a:masterClrMapping/>
@@ -2780,13 +2406,7 @@
       </p:grpSpPr>
       <p:sp>
         <p:nvSpPr>
-          <p:cNvPr id="2" name="标题占位符 1">
-            <a:extLst>
-              <a:ext uri="{FF2B5EF4-FFF2-40B4-BE49-F238E27FC236}">
-                <a16:creationId xmlns:a16="http://schemas.microsoft.com/office/drawing/2014/main" id="{D95AEC9F-7534-42F9-97B9-137F02BED49C}"/>
-              </a:ext>
-            </a:extLst>
-          </p:cNvPr>
+          <p:cNvPr id="2" name="标题占位符 1"/>
           <p:cNvSpPr>
             <a:spLocks noGrp="1"/>
           </p:cNvSpPr>
@@ -2813,18 +2433,13 @@
               <a:rPr lang="zh-CN" altLang="en-US"/>
               <a:t>单击此处编辑母版标题样式</a:t>
             </a:r>
-          </a:p>
-        </p:txBody>
-      </p:sp>
-      <p:sp>
-        <p:nvSpPr>
-          <p:cNvPr id="3" name="文本占位符 2">
-            <a:extLst>
-              <a:ext uri="{FF2B5EF4-FFF2-40B4-BE49-F238E27FC236}">
-                <a16:creationId xmlns:a16="http://schemas.microsoft.com/office/drawing/2014/main" id="{D1A9A1D3-1FD0-4120-8FB0-58E8543676A5}"/>
-              </a:ext>
-            </a:extLst>
-          </p:cNvPr>
+            <a:endParaRPr lang="zh-CN" altLang="en-US"/>
+          </a:p>
+        </p:txBody>
+      </p:sp>
+      <p:sp>
+        <p:nvSpPr>
+          <p:cNvPr id="3" name="文本占位符 2"/>
           <p:cNvSpPr>
             <a:spLocks noGrp="1"/>
           </p:cNvSpPr>
@@ -2852,6 +2467,7 @@
               <a:rPr lang="zh-CN" altLang="en-US"/>
               <a:t>单击此处编辑母版文本样式</a:t>
             </a:r>
+            <a:endParaRPr lang="zh-CN" altLang="en-US"/>
           </a:p>
           <a:p>
             <a:pPr lvl="1"/>
@@ -2859,6 +2475,7 @@
               <a:rPr lang="zh-CN" altLang="en-US"/>
               <a:t>二级</a:t>
             </a:r>
+            <a:endParaRPr lang="zh-CN" altLang="en-US"/>
           </a:p>
           <a:p>
             <a:pPr lvl="2"/>
@@ -2866,6 +2483,7 @@
               <a:rPr lang="zh-CN" altLang="en-US"/>
               <a:t>三级</a:t>
             </a:r>
+            <a:endParaRPr lang="zh-CN" altLang="en-US"/>
           </a:p>
           <a:p>
             <a:pPr lvl="3"/>
@@ -2873,6 +2491,7 @@
               <a:rPr lang="zh-CN" altLang="en-US"/>
               <a:t>四级</a:t>
             </a:r>
+            <a:endParaRPr lang="zh-CN" altLang="en-US"/>
           </a:p>
           <a:p>
             <a:pPr lvl="4"/>
@@ -2880,18 +2499,13 @@
               <a:rPr lang="zh-CN" altLang="en-US"/>
               <a:t>五级</a:t>
             </a:r>
-          </a:p>
-        </p:txBody>
-      </p:sp>
-      <p:sp>
-        <p:nvSpPr>
-          <p:cNvPr id="4" name="日期占位符 3">
-            <a:extLst>
-              <a:ext uri="{FF2B5EF4-FFF2-40B4-BE49-F238E27FC236}">
-                <a16:creationId xmlns:a16="http://schemas.microsoft.com/office/drawing/2014/main" id="{7B6279D3-4392-4A0D-A7FE-3CAE70E8A548}"/>
-              </a:ext>
-            </a:extLst>
-          </p:cNvPr>
+            <a:endParaRPr lang="zh-CN" altLang="en-US"/>
+          </a:p>
+        </p:txBody>
+      </p:sp>
+      <p:sp>
+        <p:nvSpPr>
+          <p:cNvPr id="4" name="日期占位符 3"/>
           <p:cNvSpPr>
             <a:spLocks noGrp="1"/>
           </p:cNvSpPr>
@@ -2924,7 +2538,6 @@
           <a:p>
             <a:fld id="{75BAA5F5-FC70-4B12-A99D-83B1354032EB}" type="datetimeFigureOut">
               <a:rPr lang="zh-CN" altLang="en-US" smtClean="0"/>
-              <a:t>2020/10/30</a:t>
             </a:fld>
             <a:endParaRPr lang="zh-CN" altLang="en-US"/>
           </a:p>
@@ -2932,13 +2545,7 @@
       </p:sp>
       <p:sp>
         <p:nvSpPr>
-          <p:cNvPr id="5" name="页脚占位符 4">
-            <a:extLst>
-              <a:ext uri="{FF2B5EF4-FFF2-40B4-BE49-F238E27FC236}">
-                <a16:creationId xmlns:a16="http://schemas.microsoft.com/office/drawing/2014/main" id="{3386978B-38C5-41A7-A21D-220C7A067098}"/>
-              </a:ext>
-            </a:extLst>
-          </p:cNvPr>
+          <p:cNvPr id="5" name="页脚占位符 4"/>
           <p:cNvSpPr>
             <a:spLocks noGrp="1"/>
           </p:cNvSpPr>
@@ -2975,13 +2582,7 @@
       </p:sp>
       <p:sp>
         <p:nvSpPr>
-          <p:cNvPr id="6" name="灯片编号占位符 5">
-            <a:extLst>
-              <a:ext uri="{FF2B5EF4-FFF2-40B4-BE49-F238E27FC236}">
-                <a16:creationId xmlns:a16="http://schemas.microsoft.com/office/drawing/2014/main" id="{0A76447D-81B1-438D-A748-14CD032E4D28}"/>
-              </a:ext>
-            </a:extLst>
-          </p:cNvPr>
+          <p:cNvPr id="6" name="灯片编号占位符 5"/>
           <p:cNvSpPr>
             <a:spLocks noGrp="1"/>
           </p:cNvSpPr>
@@ -3014,18 +2615,12 @@
           <a:p>
             <a:fld id="{1607E48A-8F5F-465B-A255-599B251FF974}" type="slidenum">
               <a:rPr lang="zh-CN" altLang="en-US" smtClean="0"/>
-              <a:t>‹#›</a:t>
             </a:fld>
             <a:endParaRPr lang="zh-CN" altLang="en-US"/>
           </a:p>
         </p:txBody>
       </p:sp>
     </p:spTree>
-    <p:extLst>
-      <p:ext uri="{BB962C8B-B14F-4D97-AF65-F5344CB8AC3E}">
-        <p14:creationId xmlns:p14="http://schemas.microsoft.com/office/powerpoint/2010/main" val="2474343715"/>
-      </p:ext>
-    </p:extLst>
   </p:cSld>
   <p:clrMap bg1="lt1" tx1="dk1" bg2="lt2" tx2="dk2" accent1="accent1" accent2="accent2" accent3="accent3" accent4="accent4" accent5="accent5" accent6="accent6" hlink="hlink" folHlink="folHlink"/>
   <p:sldLayoutIdLst>
@@ -3343,13 +2938,7 @@
       </p:grpSpPr>
       <p:sp>
         <p:nvSpPr>
-          <p:cNvPr id="2" name="标题 1">
-            <a:extLst>
-              <a:ext uri="{FF2B5EF4-FFF2-40B4-BE49-F238E27FC236}">
-                <a16:creationId xmlns:a16="http://schemas.microsoft.com/office/drawing/2014/main" id="{5B6EF4A6-DDCB-4FF8-8534-7F5820FC9BF9}"/>
-              </a:ext>
-            </a:extLst>
-          </p:cNvPr>
+          <p:cNvPr id="2" name="标题 1"/>
           <p:cNvSpPr>
             <a:spLocks noGrp="1"/>
           </p:cNvSpPr>
@@ -3371,18 +2960,13 @@
               <a:rPr lang="zh-CN" altLang="en-US"/>
               <a:t>实验二</a:t>
             </a:r>
-          </a:p>
-        </p:txBody>
-      </p:sp>
-      <p:sp>
-        <p:nvSpPr>
-          <p:cNvPr id="3" name="副标题 2">
-            <a:extLst>
-              <a:ext uri="{FF2B5EF4-FFF2-40B4-BE49-F238E27FC236}">
-                <a16:creationId xmlns:a16="http://schemas.microsoft.com/office/drawing/2014/main" id="{EDBE325D-D2CB-4115-B3D5-BA1704AEFBE6}"/>
-              </a:ext>
-            </a:extLst>
-          </p:cNvPr>
+            <a:endParaRPr lang="zh-CN" altLang="en-US"/>
+          </a:p>
+        </p:txBody>
+      </p:sp>
+      <p:sp>
+        <p:nvSpPr>
+          <p:cNvPr id="3" name="副标题 2"/>
           <p:cNvSpPr>
             <a:spLocks noGrp="1"/>
           </p:cNvSpPr>
@@ -3413,11 +2997,6 @@
         </p:txBody>
       </p:sp>
     </p:spTree>
-    <p:extLst>
-      <p:ext uri="{BB962C8B-B14F-4D97-AF65-F5344CB8AC3E}">
-        <p14:creationId xmlns:p14="http://schemas.microsoft.com/office/powerpoint/2010/main" val="1773873380"/>
-      </p:ext>
-    </p:extLst>
   </p:cSld>
   <p:clrMapOvr>
     <a:masterClrMapping/>
@@ -3444,13 +3023,7 @@
       </p:grpSpPr>
       <p:sp>
         <p:nvSpPr>
-          <p:cNvPr id="2" name="标题 1">
-            <a:extLst>
-              <a:ext uri="{FF2B5EF4-FFF2-40B4-BE49-F238E27FC236}">
-                <a16:creationId xmlns:a16="http://schemas.microsoft.com/office/drawing/2014/main" id="{47B886D5-DD1C-4E54-93C1-8047BEFFAEC5}"/>
-              </a:ext>
-            </a:extLst>
-          </p:cNvPr>
+          <p:cNvPr id="2" name="标题 1"/>
           <p:cNvSpPr>
             <a:spLocks noGrp="1"/>
           </p:cNvSpPr>
@@ -3471,18 +3044,13 @@
               <a:rPr lang="zh-CN" altLang="en-US"/>
               <a:t>的存储实现</a:t>
             </a:r>
-          </a:p>
-        </p:txBody>
-      </p:sp>
-      <p:sp>
-        <p:nvSpPr>
-          <p:cNvPr id="3" name="内容占位符 2">
-            <a:extLst>
-              <a:ext uri="{FF2B5EF4-FFF2-40B4-BE49-F238E27FC236}">
-                <a16:creationId xmlns:a16="http://schemas.microsoft.com/office/drawing/2014/main" id="{A7E8BC81-C026-40A2-B46E-B4ECB812BACC}"/>
-              </a:ext>
-            </a:extLst>
-          </p:cNvPr>
+            <a:endParaRPr lang="zh-CN" altLang="en-US"/>
+          </a:p>
+        </p:txBody>
+      </p:sp>
+      <p:sp>
+        <p:nvSpPr>
+          <p:cNvPr id="3" name="内容占位符 2"/>
           <p:cNvSpPr>
             <a:spLocks noGrp="1"/>
           </p:cNvSpPr>
@@ -3511,6 +3079,7 @@
               <a:rPr lang="en-US" altLang="zh-CN"/>
               <a:t>LUT or BRAM</a:t>
             </a:r>
+            <a:endParaRPr lang="en-US" altLang="zh-CN"/>
           </a:p>
           <a:p>
             <a:endParaRPr lang="en-US" altLang="zh-CN"/>
@@ -3562,15 +3131,11 @@
               <a:rPr lang="zh-CN" altLang="en-US"/>
               <a:t>核</a:t>
             </a:r>
+            <a:endParaRPr lang="zh-CN" altLang="en-US"/>
           </a:p>
         </p:txBody>
       </p:sp>
     </p:spTree>
-    <p:extLst>
-      <p:ext uri="{BB962C8B-B14F-4D97-AF65-F5344CB8AC3E}">
-        <p14:creationId xmlns:p14="http://schemas.microsoft.com/office/powerpoint/2010/main" val="4194696245"/>
-      </p:ext>
-    </p:extLst>
   </p:cSld>
   <p:clrMapOvr>
     <a:masterClrMapping/>
@@ -3597,13 +3162,7 @@
       </p:grpSpPr>
       <p:sp>
         <p:nvSpPr>
-          <p:cNvPr id="2" name="标题 1">
-            <a:extLst>
-              <a:ext uri="{FF2B5EF4-FFF2-40B4-BE49-F238E27FC236}">
-                <a16:creationId xmlns:a16="http://schemas.microsoft.com/office/drawing/2014/main" id="{A773044A-8167-4B28-97A0-2D53F8B98823}"/>
-              </a:ext>
-            </a:extLst>
-          </p:cNvPr>
+          <p:cNvPr id="2" name="标题 1"/>
           <p:cNvSpPr>
             <a:spLocks noGrp="1"/>
           </p:cNvSpPr>
@@ -3628,18 +3187,13 @@
               <a:rPr lang="zh-CN" altLang="en-US"/>
               <a:t>读命中</a:t>
             </a:r>
+            <a:endParaRPr lang="zh-CN" altLang="en-US"/>
           </a:p>
         </p:txBody>
       </p:sp>
       <p:pic>
         <p:nvPicPr>
-          <p:cNvPr id="4" name="内容占位符 3">
-            <a:extLst>
-              <a:ext uri="{FF2B5EF4-FFF2-40B4-BE49-F238E27FC236}">
-                <a16:creationId xmlns:a16="http://schemas.microsoft.com/office/drawing/2014/main" id="{7A6BFE21-519E-4FEB-A7E0-4AEB24FB35D9}"/>
-              </a:ext>
-            </a:extLst>
-          </p:cNvPr>
+          <p:cNvPr id="4" name="内容占位符 3"/>
           <p:cNvPicPr>
             <a:picLocks noGrp="1" noChangeAspect="1"/>
           </p:cNvPicPr>
@@ -3648,7 +3202,7 @@
           </p:nvPr>
         </p:nvPicPr>
         <p:blipFill>
-          <a:blip r:embed="rId2"/>
+          <a:blip r:embed="rId1"/>
           <a:stretch>
             <a:fillRect/>
           </a:stretch>
@@ -3665,13 +3219,7 @@
       </p:pic>
       <p:sp>
         <p:nvSpPr>
-          <p:cNvPr id="3" name="左大括号 2">
-            <a:extLst>
-              <a:ext uri="{FF2B5EF4-FFF2-40B4-BE49-F238E27FC236}">
-                <a16:creationId xmlns:a16="http://schemas.microsoft.com/office/drawing/2014/main" id="{7F9C8F2B-D3F3-4462-8791-C1436C0CBBC4}"/>
-              </a:ext>
-            </a:extLst>
-          </p:cNvPr>
+          <p:cNvPr id="3" name="左大括号 2"/>
           <p:cNvSpPr/>
           <p:nvPr/>
         </p:nvSpPr>
@@ -3714,13 +3262,7 @@
       </p:sp>
       <p:sp>
         <p:nvSpPr>
-          <p:cNvPr id="8" name="左大括号 7">
-            <a:extLst>
-              <a:ext uri="{FF2B5EF4-FFF2-40B4-BE49-F238E27FC236}">
-                <a16:creationId xmlns:a16="http://schemas.microsoft.com/office/drawing/2014/main" id="{90144443-6CA0-4A86-A60E-0675118CE5CB}"/>
-              </a:ext>
-            </a:extLst>
-          </p:cNvPr>
+          <p:cNvPr id="8" name="左大括号 7"/>
           <p:cNvSpPr/>
           <p:nvPr/>
         </p:nvSpPr>
@@ -3763,13 +3305,7 @@
       </p:sp>
       <p:sp>
         <p:nvSpPr>
-          <p:cNvPr id="9" name="文本框 8">
-            <a:extLst>
-              <a:ext uri="{FF2B5EF4-FFF2-40B4-BE49-F238E27FC236}">
-                <a16:creationId xmlns:a16="http://schemas.microsoft.com/office/drawing/2014/main" id="{B4E4395E-FC88-49D5-89E3-509F0430F616}"/>
-              </a:ext>
-            </a:extLst>
-          </p:cNvPr>
+          <p:cNvPr id="9" name="文本框 8"/>
           <p:cNvSpPr txBox="1"/>
           <p:nvPr/>
         </p:nvSpPr>
@@ -3805,18 +3341,13 @@
               <a:rPr lang="zh-CN" altLang="en-US"/>
               <a:t>的信号</a:t>
             </a:r>
-          </a:p>
-        </p:txBody>
-      </p:sp>
-      <p:sp>
-        <p:nvSpPr>
-          <p:cNvPr id="11" name="文本框 10">
-            <a:extLst>
-              <a:ext uri="{FF2B5EF4-FFF2-40B4-BE49-F238E27FC236}">
-                <a16:creationId xmlns:a16="http://schemas.microsoft.com/office/drawing/2014/main" id="{B5A40572-2897-473F-A077-2599DEFF3877}"/>
-              </a:ext>
-            </a:extLst>
-          </p:cNvPr>
+            <a:endParaRPr lang="zh-CN" altLang="en-US"/>
+          </a:p>
+        </p:txBody>
+      </p:sp>
+      <p:sp>
+        <p:nvSpPr>
+          <p:cNvPr id="11" name="文本框 10"/>
           <p:cNvSpPr txBox="1"/>
           <p:nvPr/>
         </p:nvSpPr>
@@ -3844,15 +3375,11 @@
               <a:rPr lang="zh-CN" altLang="en-US"/>
               <a:t>控制的信号</a:t>
             </a:r>
+            <a:endParaRPr lang="zh-CN" altLang="en-US"/>
           </a:p>
         </p:txBody>
       </p:sp>
     </p:spTree>
-    <p:extLst>
-      <p:ext uri="{BB962C8B-B14F-4D97-AF65-F5344CB8AC3E}">
-        <p14:creationId xmlns:p14="http://schemas.microsoft.com/office/powerpoint/2010/main" val="3276126375"/>
-      </p:ext>
-    </p:extLst>
   </p:cSld>
   <p:clrMapOvr>
     <a:masterClrMapping/>
@@ -3879,13 +3406,7 @@
       </p:grpSpPr>
       <p:sp>
         <p:nvSpPr>
-          <p:cNvPr id="2" name="标题 1">
-            <a:extLst>
-              <a:ext uri="{FF2B5EF4-FFF2-40B4-BE49-F238E27FC236}">
-                <a16:creationId xmlns:a16="http://schemas.microsoft.com/office/drawing/2014/main" id="{A773044A-8167-4B28-97A0-2D53F8B98823}"/>
-              </a:ext>
-            </a:extLst>
-          </p:cNvPr>
+          <p:cNvPr id="2" name="标题 1"/>
           <p:cNvSpPr>
             <a:spLocks noGrp="1"/>
           </p:cNvSpPr>
@@ -3915,18 +3436,13 @@
               <a:rPr lang="zh-CN" altLang="en-US"/>
               <a:t>读缺失</a:t>
             </a:r>
+            <a:endParaRPr lang="zh-CN" altLang="en-US"/>
           </a:p>
         </p:txBody>
       </p:sp>
       <p:pic>
         <p:nvPicPr>
-          <p:cNvPr id="6" name="内容占位符 5">
-            <a:extLst>
-              <a:ext uri="{FF2B5EF4-FFF2-40B4-BE49-F238E27FC236}">
-                <a16:creationId xmlns:a16="http://schemas.microsoft.com/office/drawing/2014/main" id="{C37845EE-7E89-44EC-BBE7-6CFC1BA6BEA0}"/>
-              </a:ext>
-            </a:extLst>
-          </p:cNvPr>
+          <p:cNvPr id="6" name="内容占位符 5"/>
           <p:cNvPicPr>
             <a:picLocks noGrp="1" noChangeAspect="1"/>
           </p:cNvPicPr>
@@ -3935,7 +3451,7 @@
           </p:nvPr>
         </p:nvPicPr>
         <p:blipFill>
-          <a:blip r:embed="rId2"/>
+          <a:blip r:embed="rId1"/>
           <a:stretch>
             <a:fillRect/>
           </a:stretch>
@@ -3952,13 +3468,7 @@
       </p:pic>
       <p:sp>
         <p:nvSpPr>
-          <p:cNvPr id="3" name="左大括号 2">
-            <a:extLst>
-              <a:ext uri="{FF2B5EF4-FFF2-40B4-BE49-F238E27FC236}">
-                <a16:creationId xmlns:a16="http://schemas.microsoft.com/office/drawing/2014/main" id="{5DEF4420-E339-4041-9519-F5380CC7EEDD}"/>
-              </a:ext>
-            </a:extLst>
-          </p:cNvPr>
+          <p:cNvPr id="3" name="左大括号 2"/>
           <p:cNvSpPr/>
           <p:nvPr/>
         </p:nvSpPr>
@@ -4001,13 +3511,7 @@
       </p:sp>
       <p:sp>
         <p:nvSpPr>
-          <p:cNvPr id="5" name="文本框 4">
-            <a:extLst>
-              <a:ext uri="{FF2B5EF4-FFF2-40B4-BE49-F238E27FC236}">
-                <a16:creationId xmlns:a16="http://schemas.microsoft.com/office/drawing/2014/main" id="{2DAC72EB-D8FD-4CA2-9A01-E5BC006514BD}"/>
-              </a:ext>
-            </a:extLst>
-          </p:cNvPr>
+          <p:cNvPr id="5" name="文本框 4"/>
           <p:cNvSpPr txBox="1"/>
           <p:nvPr/>
         </p:nvSpPr>
@@ -4043,18 +3547,13 @@
               <a:rPr lang="zh-CN" altLang="en-US"/>
               <a:t>的信号</a:t>
             </a:r>
-          </a:p>
-        </p:txBody>
-      </p:sp>
-      <p:sp>
-        <p:nvSpPr>
-          <p:cNvPr id="9" name="左大括号 8">
-            <a:extLst>
-              <a:ext uri="{FF2B5EF4-FFF2-40B4-BE49-F238E27FC236}">
-                <a16:creationId xmlns:a16="http://schemas.microsoft.com/office/drawing/2014/main" id="{3E336165-372B-441C-8881-A1C51213707C}"/>
-              </a:ext>
-            </a:extLst>
-          </p:cNvPr>
+            <a:endParaRPr lang="zh-CN" altLang="en-US"/>
+          </a:p>
+        </p:txBody>
+      </p:sp>
+      <p:sp>
+        <p:nvSpPr>
+          <p:cNvPr id="9" name="左大括号 8"/>
           <p:cNvSpPr/>
           <p:nvPr/>
         </p:nvSpPr>
@@ -4097,13 +3596,7 @@
       </p:sp>
       <p:sp>
         <p:nvSpPr>
-          <p:cNvPr id="13" name="文本框 12">
-            <a:extLst>
-              <a:ext uri="{FF2B5EF4-FFF2-40B4-BE49-F238E27FC236}">
-                <a16:creationId xmlns:a16="http://schemas.microsoft.com/office/drawing/2014/main" id="{5746D97F-F5DA-40BE-86F3-4F54906F3766}"/>
-              </a:ext>
-            </a:extLst>
-          </p:cNvPr>
+          <p:cNvPr id="13" name="文本框 12"/>
           <p:cNvSpPr txBox="1"/>
           <p:nvPr/>
         </p:nvSpPr>
@@ -4131,15 +3624,11 @@
               <a:rPr lang="zh-CN" altLang="en-US"/>
               <a:t>控制的信号</a:t>
             </a:r>
+            <a:endParaRPr lang="zh-CN" altLang="en-US"/>
           </a:p>
         </p:txBody>
       </p:sp>
     </p:spTree>
-    <p:extLst>
-      <p:ext uri="{BB962C8B-B14F-4D97-AF65-F5344CB8AC3E}">
-        <p14:creationId xmlns:p14="http://schemas.microsoft.com/office/powerpoint/2010/main" val="4280553262"/>
-      </p:ext>
-    </p:extLst>
   </p:cSld>
   <p:clrMapOvr>
     <a:masterClrMapping/>
@@ -4166,13 +3655,7 @@
       </p:grpSpPr>
       <p:sp>
         <p:nvSpPr>
-          <p:cNvPr id="2" name="标题 1">
-            <a:extLst>
-              <a:ext uri="{FF2B5EF4-FFF2-40B4-BE49-F238E27FC236}">
-                <a16:creationId xmlns:a16="http://schemas.microsoft.com/office/drawing/2014/main" id="{5F68D8DE-5896-4B0B-BC03-98FFF51759F7}"/>
-              </a:ext>
-            </a:extLst>
-          </p:cNvPr>
+          <p:cNvPr id="2" name="标题 1"/>
           <p:cNvSpPr>
             <a:spLocks noGrp="1"/>
           </p:cNvSpPr>
@@ -4196,18 +3679,13 @@
               <a:rPr lang="zh-CN" altLang="en-US"/>
               <a:t>写回策略的实现</a:t>
             </a:r>
-          </a:p>
-        </p:txBody>
-      </p:sp>
-      <p:sp>
-        <p:nvSpPr>
-          <p:cNvPr id="3" name="内容占位符 2">
-            <a:extLst>
-              <a:ext uri="{FF2B5EF4-FFF2-40B4-BE49-F238E27FC236}">
-                <a16:creationId xmlns:a16="http://schemas.microsoft.com/office/drawing/2014/main" id="{66D9E7AE-1306-417B-B45F-D878E6A62462}"/>
-              </a:ext>
-            </a:extLst>
-          </p:cNvPr>
+            <a:endParaRPr lang="zh-CN" altLang="en-US"/>
+          </a:p>
+        </p:txBody>
+      </p:sp>
+      <p:sp>
+        <p:nvSpPr>
+          <p:cNvPr id="3" name="内容占位符 2"/>
           <p:cNvSpPr>
             <a:spLocks noGrp="1"/>
           </p:cNvSpPr>
@@ -4302,15 +3780,11 @@
               <a:rPr lang="zh-CN" altLang="en-US"/>
               <a:t>行脏位是否有效</a:t>
             </a:r>
+            <a:endParaRPr lang="zh-CN" altLang="en-US"/>
           </a:p>
         </p:txBody>
       </p:sp>
     </p:spTree>
-    <p:extLst>
-      <p:ext uri="{BB962C8B-B14F-4D97-AF65-F5344CB8AC3E}">
-        <p14:creationId xmlns:p14="http://schemas.microsoft.com/office/powerpoint/2010/main" val="1952564216"/>
-      </p:ext>
-    </p:extLst>
   </p:cSld>
   <p:clrMapOvr>
     <a:masterClrMapping/>
@@ -4337,13 +3811,7 @@
       </p:grpSpPr>
       <p:sp>
         <p:nvSpPr>
-          <p:cNvPr id="2" name="标题 1">
-            <a:extLst>
-              <a:ext uri="{FF2B5EF4-FFF2-40B4-BE49-F238E27FC236}">
-                <a16:creationId xmlns:a16="http://schemas.microsoft.com/office/drawing/2014/main" id="{F6EC72A8-DCCD-4AF3-9A48-CF9FD9724621}"/>
-              </a:ext>
-            </a:extLst>
-          </p:cNvPr>
+          <p:cNvPr id="2" name="标题 1"/>
           <p:cNvSpPr>
             <a:spLocks noGrp="1"/>
           </p:cNvSpPr>
@@ -4373,18 +3841,13 @@
               <a:rPr lang="zh-CN" altLang="en-US"/>
               <a:t>接口</a:t>
             </a:r>
-          </a:p>
-        </p:txBody>
-      </p:sp>
-      <p:sp>
-        <p:nvSpPr>
-          <p:cNvPr id="3" name="内容占位符 2">
-            <a:extLst>
-              <a:ext uri="{FF2B5EF4-FFF2-40B4-BE49-F238E27FC236}">
-                <a16:creationId xmlns:a16="http://schemas.microsoft.com/office/drawing/2014/main" id="{DC68B9D7-81D0-4332-940C-77D8F4986C4A}"/>
-              </a:ext>
-            </a:extLst>
-          </p:cNvPr>
+            <a:endParaRPr lang="zh-CN" altLang="en-US"/>
+          </a:p>
+        </p:txBody>
+      </p:sp>
+      <p:sp>
+        <p:nvSpPr>
+          <p:cNvPr id="3" name="内容占位符 2"/>
           <p:cNvSpPr>
             <a:spLocks noGrp="1"/>
           </p:cNvSpPr>
@@ -4426,13 +3889,31 @@
       </p:sp>
       <p:pic>
         <p:nvPicPr>
-          <p:cNvPr id="4" name="图片 3">
-            <a:extLst>
-              <a:ext uri="{FF2B5EF4-FFF2-40B4-BE49-F238E27FC236}">
-                <a16:creationId xmlns:a16="http://schemas.microsoft.com/office/drawing/2014/main" id="{FC615E6B-3CB1-43C6-9AF8-05905AAB1B85}"/>
-              </a:ext>
-            </a:extLst>
-          </p:cNvPr>
+          <p:cNvPr id="4" name="图片 3"/>
+          <p:cNvPicPr>
+            <a:picLocks noChangeAspect="1"/>
+          </p:cNvPicPr>
+          <p:nvPr/>
+        </p:nvPicPr>
+        <p:blipFill>
+          <a:blip r:embed="rId1"/>
+          <a:stretch>
+            <a:fillRect/>
+          </a:stretch>
+        </p:blipFill>
+        <p:spPr>
+          <a:xfrm>
+            <a:off x="125990" y="2934277"/>
+            <a:ext cx="6416197" cy="3009612"/>
+          </a:xfrm>
+          <a:prstGeom prst="rect">
+            <a:avLst/>
+          </a:prstGeom>
+        </p:spPr>
+      </p:pic>
+      <p:pic>
+        <p:nvPicPr>
+          <p:cNvPr id="5" name="图片 4"/>
           <p:cNvPicPr>
             <a:picLocks noChangeAspect="1"/>
           </p:cNvPicPr>
@@ -4446,50 +3927,15 @@
         </p:blipFill>
         <p:spPr>
           <a:xfrm>
-            <a:off x="125990" y="2934277"/>
-            <a:ext cx="6416197" cy="3009612"/>
+            <a:off x="6353030" y="2934277"/>
+            <a:ext cx="5618451" cy="3701761"/>
           </a:xfrm>
           <a:prstGeom prst="rect">
             <a:avLst/>
           </a:prstGeom>
         </p:spPr>
       </p:pic>
-      <p:pic>
-        <p:nvPicPr>
-          <p:cNvPr id="5" name="图片 4">
-            <a:extLst>
-              <a:ext uri="{FF2B5EF4-FFF2-40B4-BE49-F238E27FC236}">
-                <a16:creationId xmlns:a16="http://schemas.microsoft.com/office/drawing/2014/main" id="{7A28EAE1-6556-4A04-8535-8E80333D3B48}"/>
-              </a:ext>
-            </a:extLst>
-          </p:cNvPr>
-          <p:cNvPicPr>
-            <a:picLocks noChangeAspect="1"/>
-          </p:cNvPicPr>
-          <p:nvPr/>
-        </p:nvPicPr>
-        <p:blipFill>
-          <a:blip r:embed="rId3"/>
-          <a:stretch>
-            <a:fillRect/>
-          </a:stretch>
-        </p:blipFill>
-        <p:spPr>
-          <a:xfrm>
-            <a:off x="6353030" y="2934277"/>
-            <a:ext cx="5618451" cy="3701761"/>
-          </a:xfrm>
-          <a:prstGeom prst="rect">
-            <a:avLst/>
-          </a:prstGeom>
-        </p:spPr>
-      </p:pic>
     </p:spTree>
-    <p:extLst>
-      <p:ext uri="{BB962C8B-B14F-4D97-AF65-F5344CB8AC3E}">
-        <p14:creationId xmlns:p14="http://schemas.microsoft.com/office/powerpoint/2010/main" val="1456635106"/>
-      </p:ext>
-    </p:extLst>
   </p:cSld>
   <p:clrMapOvr>
     <a:masterClrMapping/>
@@ -4516,13 +3962,7 @@
       </p:grpSpPr>
       <p:sp>
         <p:nvSpPr>
-          <p:cNvPr id="2" name="标题 1">
-            <a:extLst>
-              <a:ext uri="{FF2B5EF4-FFF2-40B4-BE49-F238E27FC236}">
-                <a16:creationId xmlns:a16="http://schemas.microsoft.com/office/drawing/2014/main" id="{DD9298EB-B89C-410F-99F0-B932FB029EAE}"/>
-              </a:ext>
-            </a:extLst>
-          </p:cNvPr>
+          <p:cNvPr id="2" name="标题 1"/>
           <p:cNvSpPr>
             <a:spLocks noGrp="1"/>
           </p:cNvSpPr>
@@ -4539,18 +3979,13 @@
               <a:rPr lang="zh-CN" altLang="en-US"/>
               <a:t>两路组相联</a:t>
             </a:r>
+            <a:endParaRPr lang="zh-CN" altLang="en-US"/>
           </a:p>
         </p:txBody>
       </p:sp>
       <p:pic>
         <p:nvPicPr>
-          <p:cNvPr id="4" name="内容占位符 3">
-            <a:extLst>
-              <a:ext uri="{FF2B5EF4-FFF2-40B4-BE49-F238E27FC236}">
-                <a16:creationId xmlns:a16="http://schemas.microsoft.com/office/drawing/2014/main" id="{409255DD-79E4-4CDF-9600-919258001D31}"/>
-              </a:ext>
-            </a:extLst>
-          </p:cNvPr>
+          <p:cNvPr id="4" name="内容占位符 3"/>
           <p:cNvPicPr>
             <a:picLocks noGrp="1" noChangeAspect="1"/>
           </p:cNvPicPr>
@@ -4559,7 +3994,7 @@
           </p:nvPr>
         </p:nvPicPr>
         <p:blipFill>
-          <a:blip r:embed="rId2"/>
+          <a:blip r:embed="rId1"/>
           <a:stretch>
             <a:fillRect/>
           </a:stretch>
@@ -4575,11 +4010,6 @@
         </p:spPr>
       </p:pic>
     </p:spTree>
-    <p:extLst>
-      <p:ext uri="{BB962C8B-B14F-4D97-AF65-F5344CB8AC3E}">
-        <p14:creationId xmlns:p14="http://schemas.microsoft.com/office/powerpoint/2010/main" val="1953690726"/>
-      </p:ext>
-    </p:extLst>
   </p:cSld>
   <p:clrMapOvr>
     <a:masterClrMapping/>
@@ -4606,13 +4036,7 @@
       </p:grpSpPr>
       <p:sp>
         <p:nvSpPr>
-          <p:cNvPr id="2" name="标题 1">
-            <a:extLst>
-              <a:ext uri="{FF2B5EF4-FFF2-40B4-BE49-F238E27FC236}">
-                <a16:creationId xmlns:a16="http://schemas.microsoft.com/office/drawing/2014/main" id="{DD8EECD5-8223-48D3-B11D-082A65E09EA3}"/>
-              </a:ext>
-            </a:extLst>
-          </p:cNvPr>
+          <p:cNvPr id="2" name="标题 1"/>
           <p:cNvSpPr>
             <a:spLocks noGrp="1"/>
           </p:cNvSpPr>
@@ -4634,18 +4058,13 @@
               <a:rPr lang="zh-CN" altLang="en-US"/>
               <a:t>仿真测试</a:t>
             </a:r>
-          </a:p>
-        </p:txBody>
-      </p:sp>
-      <p:sp>
-        <p:nvSpPr>
-          <p:cNvPr id="3" name="内容占位符 2">
-            <a:extLst>
-              <a:ext uri="{FF2B5EF4-FFF2-40B4-BE49-F238E27FC236}">
-                <a16:creationId xmlns:a16="http://schemas.microsoft.com/office/drawing/2014/main" id="{5AAC2284-9F35-44A9-9715-53D8529A4DA3}"/>
-              </a:ext>
-            </a:extLst>
-          </p:cNvPr>
+            <a:endParaRPr lang="zh-CN" altLang="en-US"/>
+          </a:p>
+        </p:txBody>
+      </p:sp>
+      <p:sp>
+        <p:nvSpPr>
+          <p:cNvPr id="3" name="内容占位符 2"/>
           <p:cNvSpPr>
             <a:spLocks noGrp="1"/>
           </p:cNvSpPr>
@@ -4778,25 +4197,20 @@
               <a:rPr lang="zh-CN" altLang="en-US"/>
               <a:t>有问题</a:t>
             </a:r>
+            <a:endParaRPr lang="zh-CN" altLang="en-US"/>
           </a:p>
         </p:txBody>
       </p:sp>
       <p:pic>
         <p:nvPicPr>
-          <p:cNvPr id="4" name="图片 3">
-            <a:extLst>
-              <a:ext uri="{FF2B5EF4-FFF2-40B4-BE49-F238E27FC236}">
-                <a16:creationId xmlns:a16="http://schemas.microsoft.com/office/drawing/2014/main" id="{1AFA4AB9-D941-4C4E-8696-250FF19D7F91}"/>
-              </a:ext>
-            </a:extLst>
-          </p:cNvPr>
+          <p:cNvPr id="4" name="图片 3"/>
           <p:cNvPicPr>
             <a:picLocks noChangeAspect="1"/>
           </p:cNvPicPr>
           <p:nvPr/>
         </p:nvPicPr>
         <p:blipFill>
-          <a:blip r:embed="rId2"/>
+          <a:blip r:embed="rId1"/>
           <a:stretch>
             <a:fillRect/>
           </a:stretch>
@@ -4812,11 +4226,6 @@
         </p:spPr>
       </p:pic>
     </p:spTree>
-    <p:extLst>
-      <p:ext uri="{BB962C8B-B14F-4D97-AF65-F5344CB8AC3E}">
-        <p14:creationId xmlns:p14="http://schemas.microsoft.com/office/powerpoint/2010/main" val="2205729287"/>
-      </p:ext>
-    </p:extLst>
   </p:cSld>
   <p:clrMapOvr>
     <a:masterClrMapping/>
@@ -4843,13 +4252,7 @@
       </p:grpSpPr>
       <p:sp>
         <p:nvSpPr>
-          <p:cNvPr id="2" name="标题 1">
-            <a:extLst>
-              <a:ext uri="{FF2B5EF4-FFF2-40B4-BE49-F238E27FC236}">
-                <a16:creationId xmlns:a16="http://schemas.microsoft.com/office/drawing/2014/main" id="{D4E9F80D-A70A-4A76-AF6A-1304806537A2}"/>
-              </a:ext>
-            </a:extLst>
-          </p:cNvPr>
+          <p:cNvPr id="2" name="标题 1"/>
           <p:cNvSpPr>
             <a:spLocks noGrp="1"/>
           </p:cNvSpPr>
@@ -4866,18 +4269,13 @@
               <a:rPr lang="zh-CN" altLang="en-US"/>
               <a:t>实验任务</a:t>
             </a:r>
+            <a:endParaRPr lang="zh-CN" altLang="en-US"/>
           </a:p>
         </p:txBody>
       </p:sp>
       <p:pic>
         <p:nvPicPr>
-          <p:cNvPr id="4" name="内容占位符 3">
-            <a:extLst>
-              <a:ext uri="{FF2B5EF4-FFF2-40B4-BE49-F238E27FC236}">
-                <a16:creationId xmlns:a16="http://schemas.microsoft.com/office/drawing/2014/main" id="{A4C006A0-2C0F-473D-8639-452BA3A9D4C8}"/>
-              </a:ext>
-            </a:extLst>
-          </p:cNvPr>
+          <p:cNvPr id="4" name="内容占位符 3"/>
           <p:cNvPicPr>
             <a:picLocks noGrp="1" noChangeAspect="1"/>
           </p:cNvPicPr>
@@ -4886,7 +4284,7 @@
           </p:nvPr>
         </p:nvPicPr>
         <p:blipFill>
-          <a:blip r:embed="rId2"/>
+          <a:blip r:embed="rId1"/>
           <a:stretch>
             <a:fillRect/>
           </a:stretch>
@@ -4902,11 +4300,6 @@
         </p:spPr>
       </p:pic>
     </p:spTree>
-    <p:extLst>
-      <p:ext uri="{BB962C8B-B14F-4D97-AF65-F5344CB8AC3E}">
-        <p14:creationId xmlns:p14="http://schemas.microsoft.com/office/powerpoint/2010/main" val="3376618922"/>
-      </p:ext>
-    </p:extLst>
   </p:cSld>
   <p:clrMapOvr>
     <a:masterClrMapping/>
@@ -4933,13 +4326,7 @@
       </p:grpSpPr>
       <p:sp>
         <p:nvSpPr>
-          <p:cNvPr id="2" name="标题 1">
-            <a:extLst>
-              <a:ext uri="{FF2B5EF4-FFF2-40B4-BE49-F238E27FC236}">
-                <a16:creationId xmlns:a16="http://schemas.microsoft.com/office/drawing/2014/main" id="{1448C23B-121D-44B3-B40A-138BBA68AF77}"/>
-              </a:ext>
-            </a:extLst>
-          </p:cNvPr>
+          <p:cNvPr id="2" name="标题 1"/>
           <p:cNvSpPr>
             <a:spLocks noGrp="1"/>
           </p:cNvSpPr>
@@ -4961,18 +4348,13 @@
               <a:rPr lang="zh-CN" altLang="en-US"/>
               <a:t>整体结构图</a:t>
             </a:r>
+            <a:endParaRPr lang="zh-CN" altLang="en-US"/>
           </a:p>
         </p:txBody>
       </p:sp>
       <p:pic>
         <p:nvPicPr>
-          <p:cNvPr id="4" name="内容占位符 3">
-            <a:extLst>
-              <a:ext uri="{FF2B5EF4-FFF2-40B4-BE49-F238E27FC236}">
-                <a16:creationId xmlns:a16="http://schemas.microsoft.com/office/drawing/2014/main" id="{87E79B0A-81FD-4D80-8871-7AFFD2B3F8E4}"/>
-              </a:ext>
-            </a:extLst>
-          </p:cNvPr>
+          <p:cNvPr id="4" name="内容占位符 3"/>
           <p:cNvPicPr>
             <a:picLocks noGrp="1" noChangeAspect="1"/>
           </p:cNvPicPr>
@@ -4981,7 +4363,7 @@
           </p:nvPr>
         </p:nvPicPr>
         <p:blipFill>
-          <a:blip r:embed="rId2"/>
+          <a:blip r:embed="rId1"/>
           <a:stretch>
             <a:fillRect/>
           </a:stretch>
@@ -4997,11 +4379,6 @@
         </p:spPr>
       </p:pic>
     </p:spTree>
-    <p:extLst>
-      <p:ext uri="{BB962C8B-B14F-4D97-AF65-F5344CB8AC3E}">
-        <p14:creationId xmlns:p14="http://schemas.microsoft.com/office/powerpoint/2010/main" val="819552760"/>
-      </p:ext>
-    </p:extLst>
   </p:cSld>
   <p:clrMapOvr>
     <a:masterClrMapping/>
@@ -5028,13 +4405,7 @@
       </p:grpSpPr>
       <p:sp>
         <p:nvSpPr>
-          <p:cNvPr id="2" name="标题 1">
-            <a:extLst>
-              <a:ext uri="{FF2B5EF4-FFF2-40B4-BE49-F238E27FC236}">
-                <a16:creationId xmlns:a16="http://schemas.microsoft.com/office/drawing/2014/main" id="{10647B16-202C-4A46-93BE-E1748889C161}"/>
-              </a:ext>
-            </a:extLst>
-          </p:cNvPr>
+          <p:cNvPr id="2" name="标题 1"/>
           <p:cNvSpPr>
             <a:spLocks noGrp="1"/>
           </p:cNvSpPr>
@@ -5055,18 +4426,13 @@
               <a:rPr lang="zh-CN" altLang="en-US"/>
               <a:t>工作原理</a:t>
             </a:r>
+            <a:endParaRPr lang="zh-CN" altLang="en-US"/>
           </a:p>
         </p:txBody>
       </p:sp>
       <p:pic>
         <p:nvPicPr>
-          <p:cNvPr id="4" name="内容占位符 3">
-            <a:extLst>
-              <a:ext uri="{FF2B5EF4-FFF2-40B4-BE49-F238E27FC236}">
-                <a16:creationId xmlns:a16="http://schemas.microsoft.com/office/drawing/2014/main" id="{D05020F0-E151-4D9E-ADEC-E73E760A3429}"/>
-              </a:ext>
-            </a:extLst>
-          </p:cNvPr>
+          <p:cNvPr id="4" name="内容占位符 3"/>
           <p:cNvPicPr>
             <a:picLocks noGrp="1" noChangeAspect="1"/>
           </p:cNvPicPr>
@@ -5075,7 +4441,7 @@
           </p:nvPr>
         </p:nvPicPr>
         <p:blipFill>
-          <a:blip r:embed="rId2"/>
+          <a:blip r:embed="rId1"/>
           <a:stretch>
             <a:fillRect/>
           </a:stretch>
@@ -5091,11 +4457,6 @@
         </p:spPr>
       </p:pic>
     </p:spTree>
-    <p:extLst>
-      <p:ext uri="{BB962C8B-B14F-4D97-AF65-F5344CB8AC3E}">
-        <p14:creationId xmlns:p14="http://schemas.microsoft.com/office/powerpoint/2010/main" val="2894680827"/>
-      </p:ext>
-    </p:extLst>
   </p:cSld>
   <p:clrMapOvr>
     <a:masterClrMapping/>
@@ -5122,13 +4483,7 @@
       </p:grpSpPr>
       <p:sp>
         <p:nvSpPr>
-          <p:cNvPr id="2" name="标题 1">
-            <a:extLst>
-              <a:ext uri="{FF2B5EF4-FFF2-40B4-BE49-F238E27FC236}">
-                <a16:creationId xmlns:a16="http://schemas.microsoft.com/office/drawing/2014/main" id="{7A5FBD0B-7A7A-4EB2-A63F-99298E35B837}"/>
-              </a:ext>
-            </a:extLst>
-          </p:cNvPr>
+          <p:cNvPr id="2" name="标题 1"/>
           <p:cNvSpPr>
             <a:spLocks noGrp="1"/>
           </p:cNvSpPr>
@@ -5149,18 +4504,13 @@
               <a:rPr lang="zh-CN" altLang="en-US"/>
               <a:t>三种基本结构</a:t>
             </a:r>
-          </a:p>
-        </p:txBody>
-      </p:sp>
-      <p:sp>
-        <p:nvSpPr>
-          <p:cNvPr id="3" name="内容占位符 2">
-            <a:extLst>
-              <a:ext uri="{FF2B5EF4-FFF2-40B4-BE49-F238E27FC236}">
-                <a16:creationId xmlns:a16="http://schemas.microsoft.com/office/drawing/2014/main" id="{B525CAE4-D94F-4B21-98A7-725E71FCD3E8}"/>
-              </a:ext>
-            </a:extLst>
-          </p:cNvPr>
+            <a:endParaRPr lang="zh-CN" altLang="en-US"/>
+          </a:p>
+        </p:txBody>
+      </p:sp>
+      <p:sp>
+        <p:nvSpPr>
+          <p:cNvPr id="3" name="内容占位符 2"/>
           <p:cNvSpPr>
             <a:spLocks noGrp="1"/>
           </p:cNvSpPr>
@@ -5222,22 +4572,18 @@
       </p:sp>
       <p:pic>
         <p:nvPicPr>
-          <p:cNvPr id="4" name="图片 3">
-            <a:extLst>
-              <a:ext uri="{FF2B5EF4-FFF2-40B4-BE49-F238E27FC236}">
-                <a16:creationId xmlns:a16="http://schemas.microsoft.com/office/drawing/2014/main" id="{C9620413-5C51-4653-B0B9-792440F58FFB}"/>
-              </a:ext>
-            </a:extLst>
-          </p:cNvPr>
+          <p:cNvPr id="4" name="图片 3"/>
           <p:cNvPicPr>
             <a:picLocks noChangeAspect="1"/>
           </p:cNvPicPr>
           <p:nvPr/>
         </p:nvPicPr>
         <p:blipFill rotWithShape="1">
-          <a:blip r:embed="rId2"/>
+          <a:blip r:embed="rId1"/>
           <a:srcRect t="9231"/>
-          <a:stretch/>
+          <a:stretch>
+            <a:fillRect/>
+          </a:stretch>
         </p:blipFill>
         <p:spPr>
           <a:xfrm>
@@ -5251,13 +4597,31 @@
       </p:pic>
       <p:pic>
         <p:nvPicPr>
-          <p:cNvPr id="5" name="图片 4">
-            <a:extLst>
-              <a:ext uri="{FF2B5EF4-FFF2-40B4-BE49-F238E27FC236}">
-                <a16:creationId xmlns:a16="http://schemas.microsoft.com/office/drawing/2014/main" id="{42E09C1D-17D6-4BF4-A570-0AB755C4C886}"/>
-              </a:ext>
-            </a:extLst>
-          </p:cNvPr>
+          <p:cNvPr id="5" name="图片 4"/>
+          <p:cNvPicPr>
+            <a:picLocks noChangeAspect="1"/>
+          </p:cNvPicPr>
+          <p:nvPr/>
+        </p:nvPicPr>
+        <p:blipFill>
+          <a:blip r:embed="rId2"/>
+          <a:stretch>
+            <a:fillRect/>
+          </a:stretch>
+        </p:blipFill>
+        <p:spPr>
+          <a:xfrm>
+            <a:off x="3531648" y="1810089"/>
+            <a:ext cx="5448300" cy="561975"/>
+          </a:xfrm>
+          <a:prstGeom prst="rect">
+            <a:avLst/>
+          </a:prstGeom>
+        </p:spPr>
+      </p:pic>
+      <p:pic>
+        <p:nvPicPr>
+          <p:cNvPr id="6" name="图片 5"/>
           <p:cNvPicPr>
             <a:picLocks noChangeAspect="1"/>
           </p:cNvPicPr>
@@ -5271,50 +4635,15 @@
         </p:blipFill>
         <p:spPr>
           <a:xfrm>
-            <a:off x="3531648" y="1810089"/>
-            <a:ext cx="5448300" cy="561975"/>
+            <a:off x="3531648" y="3917950"/>
+            <a:ext cx="5505450" cy="495300"/>
           </a:xfrm>
           <a:prstGeom prst="rect">
             <a:avLst/>
           </a:prstGeom>
         </p:spPr>
       </p:pic>
-      <p:pic>
-        <p:nvPicPr>
-          <p:cNvPr id="6" name="图片 5">
-            <a:extLst>
-              <a:ext uri="{FF2B5EF4-FFF2-40B4-BE49-F238E27FC236}">
-                <a16:creationId xmlns:a16="http://schemas.microsoft.com/office/drawing/2014/main" id="{DC37B611-6FE1-4421-A78D-6544DF93B564}"/>
-              </a:ext>
-            </a:extLst>
-          </p:cNvPr>
-          <p:cNvPicPr>
-            <a:picLocks noChangeAspect="1"/>
-          </p:cNvPicPr>
-          <p:nvPr/>
-        </p:nvPicPr>
-        <p:blipFill>
-          <a:blip r:embed="rId4"/>
-          <a:stretch>
-            <a:fillRect/>
-          </a:stretch>
-        </p:blipFill>
-        <p:spPr>
-          <a:xfrm>
-            <a:off x="3531648" y="3917950"/>
-            <a:ext cx="5505450" cy="495300"/>
-          </a:xfrm>
-          <a:prstGeom prst="rect">
-            <a:avLst/>
-          </a:prstGeom>
-        </p:spPr>
-      </p:pic>
     </p:spTree>
-    <p:extLst>
-      <p:ext uri="{BB962C8B-B14F-4D97-AF65-F5344CB8AC3E}">
-        <p14:creationId xmlns:p14="http://schemas.microsoft.com/office/powerpoint/2010/main" val="858404938"/>
-      </p:ext>
-    </p:extLst>
   </p:cSld>
   <p:clrMapOvr>
     <a:masterClrMapping/>
@@ -5341,13 +4670,7 @@
       </p:grpSpPr>
       <p:sp>
         <p:nvSpPr>
-          <p:cNvPr id="2" name="标题 1">
-            <a:extLst>
-              <a:ext uri="{FF2B5EF4-FFF2-40B4-BE49-F238E27FC236}">
-                <a16:creationId xmlns:a16="http://schemas.microsoft.com/office/drawing/2014/main" id="{78591339-6EFB-40C0-8410-13C328E9C8C0}"/>
-              </a:ext>
-            </a:extLst>
-          </p:cNvPr>
+          <p:cNvPr id="2" name="标题 1"/>
           <p:cNvSpPr>
             <a:spLocks noGrp="1"/>
           </p:cNvSpPr>
@@ -5364,18 +4687,13 @@
               <a:rPr lang="zh-CN" altLang="en-US"/>
               <a:t>直接映射</a:t>
             </a:r>
+            <a:endParaRPr lang="zh-CN" altLang="en-US"/>
           </a:p>
         </p:txBody>
       </p:sp>
       <p:pic>
         <p:nvPicPr>
-          <p:cNvPr id="4" name="内容占位符 3">
-            <a:extLst>
-              <a:ext uri="{FF2B5EF4-FFF2-40B4-BE49-F238E27FC236}">
-                <a16:creationId xmlns:a16="http://schemas.microsoft.com/office/drawing/2014/main" id="{E5C70EA3-3BBC-4D8D-8B74-FA8B9E598213}"/>
-              </a:ext>
-            </a:extLst>
-          </p:cNvPr>
+          <p:cNvPr id="4" name="内容占位符 3"/>
           <p:cNvPicPr>
             <a:picLocks noGrp="1" noChangeAspect="1"/>
           </p:cNvPicPr>
@@ -5384,7 +4702,7 @@
           </p:nvPr>
         </p:nvPicPr>
         <p:blipFill>
-          <a:blip r:embed="rId2"/>
+          <a:blip r:embed="rId1"/>
           <a:stretch>
             <a:fillRect/>
           </a:stretch>
@@ -5401,13 +4719,7 @@
       </p:pic>
       <p:sp>
         <p:nvSpPr>
-          <p:cNvPr id="5" name="文本框 4">
-            <a:extLst>
-              <a:ext uri="{FF2B5EF4-FFF2-40B4-BE49-F238E27FC236}">
-                <a16:creationId xmlns:a16="http://schemas.microsoft.com/office/drawing/2014/main" id="{7A9DA959-FB19-42D8-BFE5-F77E5220EC90}"/>
-              </a:ext>
-            </a:extLst>
-          </p:cNvPr>
+          <p:cNvPr id="5" name="文本框 4"/>
           <p:cNvSpPr txBox="1"/>
           <p:nvPr/>
         </p:nvSpPr>
@@ -5465,15 +4777,11 @@
               <a:rPr lang="zh-CN" altLang="en-US"/>
               <a:t>那么主存地址如何转换？</a:t>
             </a:r>
+            <a:endParaRPr lang="zh-CN" altLang="en-US"/>
           </a:p>
         </p:txBody>
       </p:sp>
     </p:spTree>
-    <p:extLst>
-      <p:ext uri="{BB962C8B-B14F-4D97-AF65-F5344CB8AC3E}">
-        <p14:creationId xmlns:p14="http://schemas.microsoft.com/office/powerpoint/2010/main" val="1350622589"/>
-      </p:ext>
-    </p:extLst>
   </p:cSld>
   <p:clrMapOvr>
     <a:masterClrMapping/>
@@ -5500,13 +4808,7 @@
       </p:grpSpPr>
       <p:sp>
         <p:nvSpPr>
-          <p:cNvPr id="2" name="标题 1">
-            <a:extLst>
-              <a:ext uri="{FF2B5EF4-FFF2-40B4-BE49-F238E27FC236}">
-                <a16:creationId xmlns:a16="http://schemas.microsoft.com/office/drawing/2014/main" id="{AECB7264-9F7B-487C-8762-A5161B37DEB5}"/>
-              </a:ext>
-            </a:extLst>
-          </p:cNvPr>
+          <p:cNvPr id="2" name="标题 1"/>
           <p:cNvSpPr>
             <a:spLocks noGrp="1"/>
           </p:cNvSpPr>
@@ -5540,18 +4842,13 @@
               <a:rPr lang="zh-CN" altLang="en-US"/>
               <a:t>指令）</a:t>
             </a:r>
-          </a:p>
-        </p:txBody>
-      </p:sp>
-      <p:sp>
-        <p:nvSpPr>
-          <p:cNvPr id="3" name="内容占位符 2">
-            <a:extLst>
-              <a:ext uri="{FF2B5EF4-FFF2-40B4-BE49-F238E27FC236}">
-                <a16:creationId xmlns:a16="http://schemas.microsoft.com/office/drawing/2014/main" id="{B202EFD0-264E-4614-84A2-3BB890953A09}"/>
-              </a:ext>
-            </a:extLst>
-          </p:cNvPr>
+            <a:endParaRPr lang="zh-CN" altLang="en-US"/>
+          </a:p>
+        </p:txBody>
+      </p:sp>
+      <p:sp>
+        <p:nvSpPr>
+          <p:cNvPr id="3" name="内容占位符 2"/>
           <p:cNvSpPr>
             <a:spLocks noGrp="1"/>
           </p:cNvSpPr>
@@ -5658,11 +4955,6 @@
         </p:txBody>
       </p:sp>
     </p:spTree>
-    <p:extLst>
-      <p:ext uri="{BB962C8B-B14F-4D97-AF65-F5344CB8AC3E}">
-        <p14:creationId xmlns:p14="http://schemas.microsoft.com/office/powerpoint/2010/main" val="2044278858"/>
-      </p:ext>
-    </p:extLst>
   </p:cSld>
   <p:clrMapOvr>
     <a:masterClrMapping/>
@@ -5689,13 +4981,7 @@
       </p:grpSpPr>
       <p:sp>
         <p:nvSpPr>
-          <p:cNvPr id="2" name="标题 1">
-            <a:extLst>
-              <a:ext uri="{FF2B5EF4-FFF2-40B4-BE49-F238E27FC236}">
-                <a16:creationId xmlns:a16="http://schemas.microsoft.com/office/drawing/2014/main" id="{ECA5FBA3-EA39-43BE-8790-07254D047591}"/>
-              </a:ext>
-            </a:extLst>
-          </p:cNvPr>
+          <p:cNvPr id="2" name="标题 1"/>
           <p:cNvSpPr>
             <a:spLocks noGrp="1"/>
           </p:cNvSpPr>
@@ -5725,18 +5011,13 @@
               <a:rPr lang="zh-CN" altLang="en-US"/>
               <a:t>的工作流程</a:t>
             </a:r>
+            <a:endParaRPr lang="zh-CN" altLang="en-US"/>
           </a:p>
         </p:txBody>
       </p:sp>
       <p:pic>
         <p:nvPicPr>
-          <p:cNvPr id="4" name="内容占位符 3">
-            <a:extLst>
-              <a:ext uri="{FF2B5EF4-FFF2-40B4-BE49-F238E27FC236}">
-                <a16:creationId xmlns:a16="http://schemas.microsoft.com/office/drawing/2014/main" id="{A4510F9F-1B70-4926-B90A-999516792FF5}"/>
-              </a:ext>
-            </a:extLst>
-          </p:cNvPr>
+          <p:cNvPr id="4" name="内容占位符 3"/>
           <p:cNvPicPr>
             <a:picLocks noGrp="1" noChangeAspect="1"/>
           </p:cNvPicPr>
@@ -5745,7 +5026,7 @@
           </p:nvPr>
         </p:nvPicPr>
         <p:blipFill>
-          <a:blip r:embed="rId2"/>
+          <a:blip r:embed="rId1"/>
           <a:stretch>
             <a:fillRect/>
           </a:stretch>
@@ -5761,11 +5042,6 @@
         </p:spPr>
       </p:pic>
     </p:spTree>
-    <p:extLst>
-      <p:ext uri="{BB962C8B-B14F-4D97-AF65-F5344CB8AC3E}">
-        <p14:creationId xmlns:p14="http://schemas.microsoft.com/office/powerpoint/2010/main" val="144962954"/>
-      </p:ext>
-    </p:extLst>
   </p:cSld>
   <p:clrMapOvr>
     <a:masterClrMapping/>
@@ -5792,13 +5068,7 @@
       </p:grpSpPr>
       <p:sp>
         <p:nvSpPr>
-          <p:cNvPr id="2" name="标题 1">
-            <a:extLst>
-              <a:ext uri="{FF2B5EF4-FFF2-40B4-BE49-F238E27FC236}">
-                <a16:creationId xmlns:a16="http://schemas.microsoft.com/office/drawing/2014/main" id="{ECA5FBA3-EA39-43BE-8790-07254D047591}"/>
-              </a:ext>
-            </a:extLst>
-          </p:cNvPr>
+          <p:cNvPr id="2" name="标题 1"/>
           <p:cNvSpPr>
             <a:spLocks noGrp="1"/>
           </p:cNvSpPr>
@@ -5824,25 +5094,20 @@
               <a:rPr lang="zh-CN" altLang="en-US"/>
               <a:t>的状态机的状态转移图</a:t>
             </a:r>
+            <a:endParaRPr lang="zh-CN" altLang="en-US"/>
           </a:p>
         </p:txBody>
       </p:sp>
       <p:pic>
         <p:nvPicPr>
-          <p:cNvPr id="5" name="图片 4">
-            <a:extLst>
-              <a:ext uri="{FF2B5EF4-FFF2-40B4-BE49-F238E27FC236}">
-                <a16:creationId xmlns:a16="http://schemas.microsoft.com/office/drawing/2014/main" id="{2A682209-D4BF-4CC5-8633-89CBB88CAD0F}"/>
-              </a:ext>
-            </a:extLst>
-          </p:cNvPr>
+          <p:cNvPr id="5" name="图片 4"/>
           <p:cNvPicPr>
             <a:picLocks noChangeAspect="1"/>
           </p:cNvPicPr>
           <p:nvPr/>
         </p:nvPicPr>
         <p:blipFill>
-          <a:blip r:embed="rId2"/>
+          <a:blip r:embed="rId1"/>
           <a:stretch>
             <a:fillRect/>
           </a:stretch>
@@ -5859,13 +5124,7 @@
       </p:pic>
       <p:sp>
         <p:nvSpPr>
-          <p:cNvPr id="6" name="内容占位符 5">
-            <a:extLst>
-              <a:ext uri="{FF2B5EF4-FFF2-40B4-BE49-F238E27FC236}">
-                <a16:creationId xmlns:a16="http://schemas.microsoft.com/office/drawing/2014/main" id="{9D426B70-306D-4F14-9726-D73BC536A12E}"/>
-              </a:ext>
-            </a:extLst>
-          </p:cNvPr>
+          <p:cNvPr id="6" name="内容占位符 5"/>
           <p:cNvSpPr>
             <a:spLocks noGrp="1"/>
           </p:cNvSpPr>
@@ -5942,11 +5201,6 @@
         </p:txBody>
       </p:sp>
     </p:spTree>
-    <p:extLst>
-      <p:ext uri="{BB962C8B-B14F-4D97-AF65-F5344CB8AC3E}">
-        <p14:creationId xmlns:p14="http://schemas.microsoft.com/office/powerpoint/2010/main" val="1001097890"/>
-      </p:ext>
-    </p:extLst>
   </p:cSld>
   <p:clrMapOvr>
     <a:masterClrMapping/>
@@ -5997,7 +5251,7 @@
     </a:clrScheme>
     <a:fontScheme name="Office">
       <a:majorFont>
-        <a:latin typeface="等线 Light" panose="020F0302020204030204"/>
+        <a:latin typeface="等线 Light"/>
         <a:ea typeface=""/>
         <a:cs typeface=""/>
         <a:font script="Jpan" typeface="游ゴシック Light"/>
@@ -6030,26 +5284,9 @@
         <a:font script="Viet" typeface="Times New Roman"/>
         <a:font script="Uigh" typeface="Microsoft Uighur"/>
         <a:font script="Geor" typeface="Sylfaen"/>
-        <a:font script="Armn" typeface="Arial"/>
-        <a:font script="Bugi" typeface="Leelawadee UI"/>
-        <a:font script="Bopo" typeface="Microsoft JhengHei"/>
-        <a:font script="Java" typeface="Javanese Text"/>
-        <a:font script="Lisu" typeface="Segoe UI"/>
-        <a:font script="Mymr" typeface="Myanmar Text"/>
-        <a:font script="Nkoo" typeface="Ebrima"/>
-        <a:font script="Olck" typeface="Nirmala UI"/>
-        <a:font script="Osma" typeface="Ebrima"/>
-        <a:font script="Phag" typeface="Phagspa"/>
-        <a:font script="Syrn" typeface="Estrangelo Edessa"/>
-        <a:font script="Syrj" typeface="Estrangelo Edessa"/>
-        <a:font script="Syre" typeface="Estrangelo Edessa"/>
-        <a:font script="Sora" typeface="Nirmala UI"/>
-        <a:font script="Tale" typeface="Microsoft Tai Le"/>
-        <a:font script="Talu" typeface="Microsoft New Tai Lue"/>
-        <a:font script="Tfng" typeface="Ebrima"/>
       </a:majorFont>
       <a:minorFont>
-        <a:latin typeface="等线" panose="020F0502020204030204"/>
+        <a:latin typeface="等线"/>
         <a:ea typeface=""/>
         <a:cs typeface=""/>
         <a:font script="Jpan" typeface="游ゴシック"/>
@@ -6082,23 +5319,6 @@
         <a:font script="Viet" typeface="Arial"/>
         <a:font script="Uigh" typeface="Microsoft Uighur"/>
         <a:font script="Geor" typeface="Sylfaen"/>
-        <a:font script="Armn" typeface="Arial"/>
-        <a:font script="Bugi" typeface="Leelawadee UI"/>
-        <a:font script="Bopo" typeface="Microsoft JhengHei"/>
-        <a:font script="Java" typeface="Javanese Text"/>
-        <a:font script="Lisu" typeface="Segoe UI"/>
-        <a:font script="Mymr" typeface="Myanmar Text"/>
-        <a:font script="Nkoo" typeface="Ebrima"/>
-        <a:font script="Olck" typeface="Nirmala UI"/>
-        <a:font script="Osma" typeface="Ebrima"/>
-        <a:font script="Phag" typeface="Phagspa"/>
-        <a:font script="Syrn" typeface="Estrangelo Edessa"/>
-        <a:font script="Syrj" typeface="Estrangelo Edessa"/>
-        <a:font script="Syre" typeface="Estrangelo Edessa"/>
-        <a:font script="Sora" typeface="Nirmala UI"/>
-        <a:font script="Tale" typeface="Microsoft Tai Le"/>
-        <a:font script="Talu" typeface="Microsoft New Tai Lue"/>
-        <a:font script="Tfng" typeface="Ebrima"/>
       </a:minorFont>
     </a:fontScheme>
     <a:fmtScheme name="Office">
@@ -6239,8 +5459,6 @@
       </a:bgFillStyleLst>
     </a:fmtScheme>
   </a:themeElements>
-  <a:objectDefaults/>
-  <a:extraClrSchemeLst/>
   <a:extLst>
     <a:ext uri="{05A4C25C-085E-4340-85A3-A5531E510DB2}">
       <thm15:themeFamily xmlns:thm15="http://schemas.microsoft.com/office/thememl/2012/main" name="Office Theme" id="{62F939B6-93AF-4DB8-9C6B-D6C7DFDC589F}" vid="{4A3C46E8-61CC-4603-A589-7422A47A8E4A}"/>
